--- a/docs/flitunion-foodtruck-catalog.pptx
+++ b/docs/flitunion-foodtruck-catalog.pptx
@@ -8,13 +8,12 @@
     <p:sldId id="256" r:id="rId2"/>
     <p:sldId id="257" r:id="rId3"/>
     <p:sldId id="258" r:id="rId4"/>
-    <p:sldId id="259" r:id="rId5"/>
   </p:sldIdLst>
   <p:notesMasterIdLst>
-    <p:notesMasterId r:id="rId6"/>
+    <p:notesMasterId r:id="rId5"/>
   </p:notesMasterIdLst>
-  <p:sldSz cx="7562088" cy="10689336"/>
-  <p:notesSz cx="10689336" cy="7562088"/>
+  <p:sldSz cx="12191695" cy="6858000"/>
+  <p:notesSz cx="6858000" cy="12191695"/>
   <p:defaultTextStyle>
     <a:lvl1pPr marL="0" algn="l" defTabSz="914400" rtl="0" eaLnBrk="1" latinLnBrk="0" hangingPunct="1">
       <a:defRPr sz="1800" kern="1200">
@@ -705,94 +704,6 @@
             <a:fld id="{F7021451-1387-4CA6-816F-3879F97B5CBC}" type="slidenum">
               <a:rPr lang="en-US"/>
               <a:t>3</a:t>
-            </a:fld>
-            <a:endParaRPr lang="en-US"/>
-          </a:p>
-        </p:txBody>
-      </p:sp>
-    </p:spTree>
-    <p:extLst>
-      <p:ext uri="{BB962C8B-B14F-4D97-AF65-F5344CB8AC3E}">
-        <p14:creationId xmlns:p14="http://schemas.microsoft.com/office/powerpoint/2010/main" val="1024086991"/>
-      </p:ext>
-    </p:extLst>
-  </p:cSld>
-  <p:clrMapOvr>
-    <a:masterClrMapping/>
-  </p:clrMapOvr>
-</p:notes>
-</file>
-
-<file path=ppt/notesSlides/notesSlide4.xml><?xml version="1.0" encoding="utf-8"?>
-<p:notes xmlns:a="http://schemas.openxmlformats.org/drawingml/2006/main" xmlns:r="http://schemas.openxmlformats.org/officeDocument/2006/relationships" xmlns:p="http://schemas.openxmlformats.org/presentationml/2006/main">
-  <p:cSld>
-    <p:spTree>
-      <p:nvGrpSpPr>
-        <p:cNvPr id="1" name=""/>
-        <p:cNvGrpSpPr/>
-        <p:nvPr/>
-      </p:nvGrpSpPr>
-      <p:grpSpPr>
-        <a:xfrm>
-          <a:off x="0" y="0"/>
-          <a:ext cx="0" cy="0"/>
-          <a:chOff x="0" y="0"/>
-          <a:chExt cx="0" cy="0"/>
-        </a:xfrm>
-      </p:grpSpPr>
-      <p:sp>
-        <p:nvSpPr>
-          <p:cNvPr id="2" name="Slide Image Placeholder 1"/>
-          <p:cNvSpPr>
-            <a:spLocks noGrp="1" noRot="1" noChangeAspect="1"/>
-          </p:cNvSpPr>
-          <p:nvPr>
-            <p:ph type="sldImg"/>
-          </p:nvPr>
-        </p:nvSpPr>
-        <p:spPr/>
-      </p:sp>
-      <p:sp>
-        <p:nvSpPr>
-          <p:cNvPr id="3" name="Notes Placeholder 2"/>
-          <p:cNvSpPr>
-            <a:spLocks noGrp="1"/>
-          </p:cNvSpPr>
-          <p:nvPr>
-            <p:ph type="body" idx="1"/>
-          </p:nvPr>
-        </p:nvSpPr>
-        <p:spPr/>
-        <p:txBody>
-          <a:bodyPr/>
-          <a:lstStyle/>
-          <a:p>
-            <a:r>
-              <a:rPr lang="en-US" dirty="0"/>
-              <a:t/>
-            </a:r>
-            <a:endParaRPr lang="en-US" dirty="0"/>
-          </a:p>
-        </p:txBody>
-      </p:sp>
-      <p:sp>
-        <p:nvSpPr>
-          <p:cNvPr id="4" name="Slide Number Placeholder 3"/>
-          <p:cNvSpPr>
-            <a:spLocks noGrp="1"/>
-          </p:cNvSpPr>
-          <p:nvPr>
-            <p:ph type="sldNum" sz="quarter" idx="10"/>
-          </p:nvPr>
-        </p:nvSpPr>
-        <p:spPr/>
-        <p:txBody>
-          <a:bodyPr/>
-          <a:lstStyle/>
-          <a:p>
-            <a:fld id="{F7021451-1387-4CA6-816F-3879F97B5CBC}" type="slidenum">
-              <a:rPr lang="en-US"/>
-              <a:t>4</a:t>
             </a:fld>
             <a:endParaRPr lang="en-US"/>
           </a:p>
@@ -1150,8 +1061,8 @@
         </p:nvSpPr>
         <p:spPr>
           <a:xfrm>
-            <a:off x="0" y="566928"/>
-            <a:ext cx="7562088" cy="566928"/>
+            <a:off x="0" y="201168"/>
+            <a:ext cx="12191695" cy="274320"/>
           </a:xfrm>
           <a:prstGeom prst="rect">
             <a:avLst/>
@@ -1167,7 +1078,7 @@
               <a:buNone/>
             </a:pPr>
             <a:r>
-              <a:rPr lang="en-US" sz="3400" b="1" spc="100" kern="0" dirty="0">
+              <a:rPr lang="en-US" sz="1600" b="1" spc="100" kern="0" dirty="0">
                 <a:solidFill>
                   <a:srgbClr val="3182F6"/>
                 </a:solidFill>
@@ -1177,7 +1088,7 @@
               </a:rPr>
               <a:t>플릿 유니온</a:t>
             </a:r>
-            <a:endParaRPr lang="en-US" sz="3400" dirty="0"/>
+            <a:endParaRPr lang="en-US" sz="1600" dirty="0"/>
           </a:p>
         </p:txBody>
       </p:sp>
@@ -1189,8 +1100,8 @@
         </p:nvSpPr>
         <p:spPr>
           <a:xfrm>
-            <a:off x="0" y="1078992"/>
-            <a:ext cx="7562088" cy="713232"/>
+            <a:off x="0" y="457200"/>
+            <a:ext cx="12191695" cy="457200"/>
           </a:xfrm>
           <a:prstGeom prst="rect">
             <a:avLst/>
@@ -1206,7 +1117,7 @@
               <a:buNone/>
             </a:pPr>
             <a:r>
-              <a:rPr lang="en-US" sz="4400" b="1" dirty="0">
+              <a:rPr lang="en-US" sz="2800" b="1" dirty="0">
                 <a:solidFill>
                   <a:srgbClr val="0B1F44"/>
                 </a:solidFill>
@@ -1216,7 +1127,7 @@
               </a:rPr>
               <a:t>푸드트럭 메뉴</a:t>
             </a:r>
-            <a:endParaRPr lang="en-US" sz="4400" dirty="0"/>
+            <a:endParaRPr lang="en-US" sz="2800" dirty="0"/>
           </a:p>
         </p:txBody>
       </p:sp>
@@ -1228,8 +1139,8 @@
         </p:nvSpPr>
         <p:spPr>
           <a:xfrm>
-            <a:off x="1220724" y="1847088"/>
-            <a:ext cx="5120640" cy="402336"/>
+            <a:off x="3809848" y="932688"/>
+            <a:ext cx="4572000" cy="310896"/>
           </a:xfrm>
           <a:prstGeom prst="roundRect">
             <a:avLst>
@@ -1255,8 +1166,8 @@
         </p:nvSpPr>
         <p:spPr>
           <a:xfrm>
-            <a:off x="1220724" y="1847088"/>
-            <a:ext cx="5120640" cy="402336"/>
+            <a:off x="3809848" y="932688"/>
+            <a:ext cx="4572000" cy="310896"/>
           </a:xfrm>
           <a:prstGeom prst="rect">
             <a:avLst/>
@@ -1272,7 +1183,7 @@
               <a:buNone/>
             </a:pPr>
             <a:r>
-              <a:rPr lang="en-US" sz="1300" b="1" dirty="0">
+              <a:rPr lang="en-US" sz="1100" b="1" dirty="0">
                 <a:solidFill>
                   <a:srgbClr val="0B1F44"/>
                 </a:solidFill>
@@ -1280,15 +1191,15 @@
                 <a:ea typeface="Malgun Gothic" pitchFamily="34" charset="-122"/>
                 <a:cs typeface="Malgun Gothic" pitchFamily="34" charset="-120"/>
               </a:rPr>
-              <a:t>· 식사류 — 한식 · 양식 ·</a:t>
-            </a:r>
-            <a:endParaRPr lang="en-US" sz="1300" dirty="0"/>
+              <a:t>· 식사류 — 한식 · 양식 · 일식 ·</a:t>
+            </a:r>
+            <a:endParaRPr lang="en-US" sz="1100" dirty="0"/>
           </a:p>
         </p:txBody>
       </p:sp>
       <p:pic>
         <p:nvPicPr>
-          <p:cNvPr id="6" name="Image 0" descr="/tmp/claude-0/-home-user/0916ad07-ee04-5cb5-987c-27fb9c83eb46/scratchpad/catalog/ft/gopchang.jpg">    </p:cNvPr>
+          <p:cNvPr id="6" name="Image 0" descr="/home/user/Flitunion/docs/photos/foodtruck-menu/gopchang.jpg">    </p:cNvPr>
           <p:cNvPicPr>
             <a:picLocks noChangeAspect="1"/>
           </p:cNvPicPr>
@@ -1302,8 +1213,8 @@
         </p:blipFill>
         <p:spPr>
           <a:xfrm>
-            <a:off x="566928" y="2395728"/>
-            <a:ext cx="1972056" cy="1972056"/>
+            <a:off x="457200" y="1443228"/>
+            <a:ext cx="1417320" cy="1417320"/>
           </a:xfrm>
           <a:prstGeom prst="rect">
             <a:avLst/>
@@ -1318,8 +1229,8 @@
         </p:nvSpPr>
         <p:spPr>
           <a:xfrm>
-            <a:off x="566928" y="4477512"/>
-            <a:ext cx="1972056" cy="384048"/>
+            <a:off x="2020824" y="1443228"/>
+            <a:ext cx="2012594" cy="292608"/>
           </a:xfrm>
           <a:prstGeom prst="rect">
             <a:avLst/>
@@ -1335,7 +1246,7 @@
               <a:buNone/>
             </a:pPr>
             <a:r>
-              <a:rPr lang="en-US" sz="1500" b="1" dirty="0">
+              <a:rPr lang="en-US" sz="1300" b="1" dirty="0">
                 <a:solidFill>
                   <a:srgbClr val="0F172A"/>
                 </a:solidFill>
@@ -1345,7 +1256,7 @@
               </a:rPr>
               <a:t>곱창</a:t>
             </a:r>
-            <a:endParaRPr lang="en-US" sz="1500" dirty="0"/>
+            <a:endParaRPr lang="en-US" sz="1300" dirty="0"/>
           </a:p>
         </p:txBody>
       </p:sp>
@@ -1357,8 +1268,8 @@
         </p:nvSpPr>
         <p:spPr>
           <a:xfrm>
-            <a:off x="566928" y="4861560"/>
-            <a:ext cx="1972056" cy="960120"/>
+            <a:off x="2020824" y="1735836"/>
+            <a:ext cx="2012594" cy="1124712"/>
           </a:xfrm>
           <a:prstGeom prst="rect">
             <a:avLst/>
@@ -1372,12 +1283,12 @@
           <a:p>
             <a:pPr algn="l" indent="0" marL="0">
               <a:lnSpc>
-                <a:spcPct val="124000"/>
+                <a:spcPct val="120000"/>
               </a:lnSpc>
               <a:buNone/>
             </a:pPr>
             <a:r>
-              <a:rPr lang="en-US" sz="950" dirty="0">
+              <a:rPr lang="en-US" sz="800" dirty="0">
                 <a:solidFill>
                   <a:srgbClr val="475569"/>
                 </a:solidFill>
@@ -1387,13 +1298,13 @@
               </a:rPr>
               <a:t>철판에 볶아내는 야채곱창과 곱창볶음밥. 저녁·주류 수요가 붙는 야시장형 메뉴</a:t>
             </a:r>
-            <a:endParaRPr lang="en-US" sz="950" dirty="0"/>
+            <a:endParaRPr lang="en-US" sz="800" dirty="0"/>
           </a:p>
         </p:txBody>
       </p:sp>
       <p:pic>
         <p:nvPicPr>
-          <p:cNvPr id="9" name="Image 1" descr="/tmp/claude-0/-home-user/0916ad07-ee04-5cb5-987c-27fb9c83eb46/scratchpad/catalog/ft/cozeat.jpg">    </p:cNvPr>
+          <p:cNvPr id="9" name="Image 1" descr="/home/user/Flitunion/docs/photos/foodtruck-menu/cozeat.jpg">    </p:cNvPr>
           <p:cNvPicPr>
             <a:picLocks noChangeAspect="1"/>
           </p:cNvPicPr>
@@ -1407,8 +1318,8 @@
         </p:blipFill>
         <p:spPr>
           <a:xfrm>
-            <a:off x="2795016" y="2395728"/>
-            <a:ext cx="1972056" cy="1972056"/>
+            <a:off x="4307738" y="1443228"/>
+            <a:ext cx="1417320" cy="1417320"/>
           </a:xfrm>
           <a:prstGeom prst="rect">
             <a:avLst/>
@@ -1423,8 +1334,8 @@
         </p:nvSpPr>
         <p:spPr>
           <a:xfrm>
-            <a:off x="2795016" y="4477512"/>
-            <a:ext cx="1972056" cy="384048"/>
+            <a:off x="5871362" y="1443228"/>
+            <a:ext cx="2012594" cy="292608"/>
           </a:xfrm>
           <a:prstGeom prst="rect">
             <a:avLst/>
@@ -1440,7 +1351,7 @@
               <a:buNone/>
             </a:pPr>
             <a:r>
-              <a:rPr lang="en-US" sz="1500" b="1" dirty="0">
+              <a:rPr lang="en-US" sz="1300" b="1" dirty="0">
                 <a:solidFill>
                   <a:srgbClr val="0F172A"/>
                 </a:solidFill>
@@ -1450,7 +1361,7 @@
               </a:rPr>
               <a:t>떡튀순</a:t>
             </a:r>
-            <a:endParaRPr lang="en-US" sz="1500" dirty="0"/>
+            <a:endParaRPr lang="en-US" sz="1300" dirty="0"/>
           </a:p>
         </p:txBody>
       </p:sp>
@@ -1462,8 +1373,8 @@
         </p:nvSpPr>
         <p:spPr>
           <a:xfrm>
-            <a:off x="2795016" y="4861560"/>
-            <a:ext cx="1972056" cy="960120"/>
+            <a:off x="5871362" y="1735836"/>
+            <a:ext cx="2012594" cy="1124712"/>
           </a:xfrm>
           <a:prstGeom prst="rect">
             <a:avLst/>
@@ -1477,12 +1388,12 @@
           <a:p>
             <a:pPr algn="l" indent="0" marL="0">
               <a:lnSpc>
-                <a:spcPct val="124000"/>
+                <a:spcPct val="120000"/>
               </a:lnSpc>
               <a:buNone/>
             </a:pPr>
             <a:r>
-              <a:rPr lang="en-US" sz="950" dirty="0">
+              <a:rPr lang="en-US" sz="800" dirty="0">
                 <a:solidFill>
                   <a:srgbClr val="475569"/>
                 </a:solidFill>
@@ -1492,13 +1403,13 @@
               </a:rPr>
               <a:t>떡볶이·오뎅·튀김 3종. 5,000~9,000원대로 회전이 가장 빠른 품목</a:t>
             </a:r>
-            <a:endParaRPr lang="en-US" sz="950" dirty="0"/>
+            <a:endParaRPr lang="en-US" sz="800" dirty="0"/>
           </a:p>
         </p:txBody>
       </p:sp>
       <p:pic>
         <p:nvPicPr>
-          <p:cNvPr id="12" name="Image 2" descr="/tmp/claude-0/-home-user/0916ad07-ee04-5cb5-987c-27fb9c83eb46/scratchpad/catalog/ft/dakgangjeong.jpg">    </p:cNvPr>
+          <p:cNvPr id="12" name="Image 2" descr="/home/user/Flitunion/docs/photos/foodtruck-menu/dakgangjeong.jpg">    </p:cNvPr>
           <p:cNvPicPr>
             <a:picLocks noChangeAspect="1"/>
           </p:cNvPicPr>
@@ -1512,8 +1423,8 @@
         </p:blipFill>
         <p:spPr>
           <a:xfrm>
-            <a:off x="5023104" y="2395728"/>
-            <a:ext cx="1972056" cy="1972056"/>
+            <a:off x="8158277" y="1443228"/>
+            <a:ext cx="1417320" cy="1417320"/>
           </a:xfrm>
           <a:prstGeom prst="rect">
             <a:avLst/>
@@ -1528,8 +1439,8 @@
         </p:nvSpPr>
         <p:spPr>
           <a:xfrm>
-            <a:off x="5023104" y="4477512"/>
-            <a:ext cx="1972056" cy="384048"/>
+            <a:off x="9721901" y="1443228"/>
+            <a:ext cx="2012594" cy="292608"/>
           </a:xfrm>
           <a:prstGeom prst="rect">
             <a:avLst/>
@@ -1545,7 +1456,7 @@
               <a:buNone/>
             </a:pPr>
             <a:r>
-              <a:rPr lang="en-US" sz="1500" b="1" dirty="0">
+              <a:rPr lang="en-US" sz="1300" b="1" dirty="0">
                 <a:solidFill>
                   <a:srgbClr val="0F172A"/>
                 </a:solidFill>
@@ -1555,7 +1466,7 @@
               </a:rPr>
               <a:t>닭강정</a:t>
             </a:r>
-            <a:endParaRPr lang="en-US" sz="1500" dirty="0"/>
+            <a:endParaRPr lang="en-US" sz="1300" dirty="0"/>
           </a:p>
         </p:txBody>
       </p:sp>
@@ -1567,8 +1478,8 @@
         </p:nvSpPr>
         <p:spPr>
           <a:xfrm>
-            <a:off x="5023104" y="4861560"/>
-            <a:ext cx="1972056" cy="960120"/>
+            <a:off x="9721901" y="1735836"/>
+            <a:ext cx="2012594" cy="1124712"/>
           </a:xfrm>
           <a:prstGeom prst="rect">
             <a:avLst/>
@@ -1582,12 +1493,12 @@
           <a:p>
             <a:pPr algn="l" indent="0" marL="0">
               <a:lnSpc>
-                <a:spcPct val="124000"/>
+                <a:spcPct val="120000"/>
               </a:lnSpc>
               <a:buNone/>
             </a:pPr>
             <a:r>
-              <a:rPr lang="en-US" sz="950" dirty="0">
+              <a:rPr lang="en-US" sz="800" dirty="0">
                 <a:solidFill>
                   <a:srgbClr val="475569"/>
                 </a:solidFill>
@@ -1597,13 +1508,13 @@
               </a:rPr>
               <a:t>간장·양념 닭강정. 컵 포장이라 걸어 다니며 먹기 좋음</a:t>
             </a:r>
-            <a:endParaRPr lang="en-US" sz="950" dirty="0"/>
+            <a:endParaRPr lang="en-US" sz="800" dirty="0"/>
           </a:p>
         </p:txBody>
       </p:sp>
       <p:pic>
         <p:nvPicPr>
-          <p:cNvPr id="15" name="Image 3" descr="/tmp/claude-0/-home-user/0916ad07-ee04-5cb5-987c-27fb9c83eb46/scratchpad/catalog/ft/dutch-kkochi.jpg">    </p:cNvPr>
+          <p:cNvPr id="15" name="Image 3" descr="/home/user/Flitunion/docs/photos/foodtruck-menu/dutch-kkochi.jpg">    </p:cNvPr>
           <p:cNvPicPr>
             <a:picLocks noChangeAspect="1"/>
           </p:cNvPicPr>
@@ -1617,8 +1528,8 @@
         </p:blipFill>
         <p:spPr>
           <a:xfrm>
-            <a:off x="566928" y="6150864"/>
-            <a:ext cx="1972056" cy="1972056"/>
+            <a:off x="457200" y="3204972"/>
+            <a:ext cx="1417320" cy="1417320"/>
           </a:xfrm>
           <a:prstGeom prst="rect">
             <a:avLst/>
@@ -1633,8 +1544,8 @@
         </p:nvSpPr>
         <p:spPr>
           <a:xfrm>
-            <a:off x="566928" y="8232648"/>
-            <a:ext cx="1972056" cy="384048"/>
+            <a:off x="2020824" y="3204972"/>
+            <a:ext cx="2012594" cy="292608"/>
           </a:xfrm>
           <a:prstGeom prst="rect">
             <a:avLst/>
@@ -1650,7 +1561,7 @@
               <a:buNone/>
             </a:pPr>
             <a:r>
-              <a:rPr lang="en-US" sz="1500" b="1" dirty="0">
+              <a:rPr lang="en-US" sz="1300" b="1" dirty="0">
                 <a:solidFill>
                   <a:srgbClr val="0F172A"/>
                 </a:solidFill>
@@ -1660,7 +1571,7 @@
               </a:rPr>
               <a:t>닭꼬치</a:t>
             </a:r>
-            <a:endParaRPr lang="en-US" sz="1500" dirty="0"/>
+            <a:endParaRPr lang="en-US" sz="1300" dirty="0"/>
           </a:p>
         </p:txBody>
       </p:sp>
@@ -1672,8 +1583,8 @@
         </p:nvSpPr>
         <p:spPr>
           <a:xfrm>
-            <a:off x="566928" y="8616696"/>
-            <a:ext cx="1972056" cy="960120"/>
+            <a:off x="2020824" y="3497580"/>
+            <a:ext cx="2012594" cy="1124712"/>
           </a:xfrm>
           <a:prstGeom prst="rect">
             <a:avLst/>
@@ -1687,12 +1598,12 @@
           <a:p>
             <a:pPr algn="l" indent="0" marL="0">
               <a:lnSpc>
-                <a:spcPct val="124000"/>
+                <a:spcPct val="120000"/>
               </a:lnSpc>
               <a:buNone/>
             </a:pPr>
             <a:r>
-              <a:rPr lang="en-US" sz="950" dirty="0">
+              <a:rPr lang="en-US" sz="800" dirty="0">
                 <a:solidFill>
                   <a:srgbClr val="475569"/>
                 </a:solidFill>
@@ -1702,13 +1613,13 @@
               </a:rPr>
               <a:t>소금구이·데리야끼·매운맛 3종. 5,000원대 저단가 회전 메뉴</a:t>
             </a:r>
-            <a:endParaRPr lang="en-US" sz="950" dirty="0"/>
+            <a:endParaRPr lang="en-US" sz="800" dirty="0"/>
           </a:p>
         </p:txBody>
       </p:sp>
       <p:pic>
         <p:nvPicPr>
-          <p:cNvPr id="18" name="Image 4" descr="/tmp/claude-0/-home-user/0916ad07-ee04-5cb5-987c-27fb9c83eb46/scratchpad/catalog/ft/steak.jpg">    </p:cNvPr>
+          <p:cNvPr id="18" name="Image 4" descr="/home/user/Flitunion/docs/photos/foodtruck-menu/steak.jpg">    </p:cNvPr>
           <p:cNvPicPr>
             <a:picLocks noChangeAspect="1"/>
           </p:cNvPicPr>
@@ -1722,8 +1633,8 @@
         </p:blipFill>
         <p:spPr>
           <a:xfrm>
-            <a:off x="2795016" y="6150864"/>
-            <a:ext cx="1972056" cy="1972056"/>
+            <a:off x="4307738" y="3204972"/>
+            <a:ext cx="1417320" cy="1417320"/>
           </a:xfrm>
           <a:prstGeom prst="rect">
             <a:avLst/>
@@ -1738,8 +1649,8 @@
         </p:nvSpPr>
         <p:spPr>
           <a:xfrm>
-            <a:off x="2795016" y="8232648"/>
-            <a:ext cx="1972056" cy="384048"/>
+            <a:off x="5871362" y="3204972"/>
+            <a:ext cx="2012594" cy="292608"/>
           </a:xfrm>
           <a:prstGeom prst="rect">
             <a:avLst/>
@@ -1755,7 +1666,7 @@
               <a:buNone/>
             </a:pPr>
             <a:r>
-              <a:rPr lang="en-US" sz="1500" b="1" dirty="0">
+              <a:rPr lang="en-US" sz="1300" b="1" dirty="0">
                 <a:solidFill>
                   <a:srgbClr val="0F172A"/>
                 </a:solidFill>
@@ -1765,7 +1676,7 @@
               </a:rPr>
               <a:t>스테이크</a:t>
             </a:r>
-            <a:endParaRPr lang="en-US" sz="1500" dirty="0"/>
+            <a:endParaRPr lang="en-US" sz="1300" dirty="0"/>
           </a:p>
         </p:txBody>
       </p:sp>
@@ -1777,8 +1688,8 @@
         </p:nvSpPr>
         <p:spPr>
           <a:xfrm>
-            <a:off x="2795016" y="8616696"/>
-            <a:ext cx="1972056" cy="960120"/>
+            <a:off x="5871362" y="3497580"/>
+            <a:ext cx="2012594" cy="1124712"/>
           </a:xfrm>
           <a:prstGeom prst="rect">
             <a:avLst/>
@@ -1792,12 +1703,12 @@
           <a:p>
             <a:pPr algn="l" indent="0" marL="0">
               <a:lnSpc>
-                <a:spcPct val="124000"/>
+                <a:spcPct val="120000"/>
               </a:lnSpc>
               <a:buNone/>
             </a:pPr>
             <a:r>
-              <a:rPr lang="en-US" sz="950" dirty="0">
+              <a:rPr lang="en-US" sz="800" dirty="0">
                 <a:solidFill>
                   <a:srgbClr val="475569"/>
                 </a:solidFill>
@@ -1807,13 +1718,13 @@
               </a:rPr>
               <a:t>즉석 구이 스테이크와 도시락 구성. 객단가가 가장 높은 메인 메뉴</a:t>
             </a:r>
-            <a:endParaRPr lang="en-US" sz="950" dirty="0"/>
+            <a:endParaRPr lang="en-US" sz="800" dirty="0"/>
           </a:p>
         </p:txBody>
       </p:sp>
       <p:pic>
         <p:nvPicPr>
-          <p:cNvPr id="21" name="Image 5" descr="/tmp/claude-0/-home-user/0916ad07-ee04-5cb5-987c-27fb9c83eb46/scratchpad/catalog/ft/pizza.jpg">    </p:cNvPr>
+          <p:cNvPr id="21" name="Image 5" descr="/home/user/Flitunion/docs/photos/foodtruck-menu/pizza.jpg">    </p:cNvPr>
           <p:cNvPicPr>
             <a:picLocks noChangeAspect="1"/>
           </p:cNvPicPr>
@@ -1827,8 +1738,8 @@
         </p:blipFill>
         <p:spPr>
           <a:xfrm>
-            <a:off x="5023104" y="6150864"/>
-            <a:ext cx="1972056" cy="1972056"/>
+            <a:off x="8158277" y="3204972"/>
+            <a:ext cx="1417320" cy="1417320"/>
           </a:xfrm>
           <a:prstGeom prst="rect">
             <a:avLst/>
@@ -1843,8 +1754,8 @@
         </p:nvSpPr>
         <p:spPr>
           <a:xfrm>
-            <a:off x="5023104" y="8232648"/>
-            <a:ext cx="1972056" cy="384048"/>
+            <a:off x="9721901" y="3204972"/>
+            <a:ext cx="2012594" cy="292608"/>
           </a:xfrm>
           <a:prstGeom prst="rect">
             <a:avLst/>
@@ -1860,7 +1771,7 @@
               <a:buNone/>
             </a:pPr>
             <a:r>
-              <a:rPr lang="en-US" sz="1500" b="1" dirty="0">
+              <a:rPr lang="en-US" sz="1300" b="1" dirty="0">
                 <a:solidFill>
                   <a:srgbClr val="0F172A"/>
                 </a:solidFill>
@@ -1870,7 +1781,7 @@
               </a:rPr>
               <a:t>화덕피자</a:t>
             </a:r>
-            <a:endParaRPr lang="en-US" sz="1500" dirty="0"/>
+            <a:endParaRPr lang="en-US" sz="1300" dirty="0"/>
           </a:p>
         </p:txBody>
       </p:sp>
@@ -1882,8 +1793,8 @@
         </p:nvSpPr>
         <p:spPr>
           <a:xfrm>
-            <a:off x="5023104" y="8616696"/>
-            <a:ext cx="1972056" cy="960120"/>
+            <a:off x="9721901" y="3497580"/>
+            <a:ext cx="2012594" cy="1124712"/>
           </a:xfrm>
           <a:prstGeom prst="rect">
             <a:avLst/>
@@ -1897,12 +1808,12 @@
           <a:p>
             <a:pPr algn="l" indent="0" marL="0">
               <a:lnSpc>
-                <a:spcPct val="124000"/>
+                <a:spcPct val="120000"/>
               </a:lnSpc>
               <a:buNone/>
             </a:pPr>
             <a:r>
-              <a:rPr lang="en-US" sz="950" dirty="0">
+              <a:rPr lang="en-US" sz="800" dirty="0">
                 <a:solidFill>
                   <a:srgbClr val="475569"/>
                 </a:solidFill>
@@ -1912,20 +1823,374 @@
               </a:rPr>
               <a:t>페퍼로니·버섯·고르곤졸라. 화덕 자체가 볼거리가 되는 부스</a:t>
             </a:r>
-            <a:endParaRPr lang="en-US" sz="950" dirty="0"/>
-          </a:p>
-        </p:txBody>
-      </p:sp>
-      <p:sp>
-        <p:nvSpPr>
-          <p:cNvPr id="24" name="Text 16"/>
-          <p:cNvSpPr txBox="1"/>
-          <p:nvPr/>
-        </p:nvSpPr>
-        <p:spPr>
-          <a:xfrm>
-            <a:off x="566928" y="10122408"/>
-            <a:ext cx="6428232" cy="274320"/>
+            <a:endParaRPr lang="en-US" sz="800" dirty="0"/>
+          </a:p>
+        </p:txBody>
+      </p:sp>
+      <p:pic>
+        <p:nvPicPr>
+          <p:cNvPr id="24" name="Image 6" descr="/home/user/Flitunion/docs/photos/foodtruck-menu/kebab.jpg">    </p:cNvPr>
+          <p:cNvPicPr>
+            <a:picLocks noChangeAspect="1"/>
+          </p:cNvPicPr>
+          <p:nvPr/>
+        </p:nvPicPr>
+        <p:blipFill>
+          <a:blip r:embed="rId7"/>
+          <a:stretch>
+            <a:fillRect/>
+          </a:stretch>
+        </p:blipFill>
+        <p:spPr>
+          <a:xfrm>
+            <a:off x="457200" y="4966716"/>
+            <a:ext cx="1417320" cy="1417320"/>
+          </a:xfrm>
+          <a:prstGeom prst="rect">
+            <a:avLst/>
+          </a:prstGeom>
+        </p:spPr>
+      </p:pic>
+      <p:sp>
+        <p:nvSpPr>
+          <p:cNvPr id="25" name="Text 16"/>
+          <p:cNvSpPr txBox="1"/>
+          <p:nvPr/>
+        </p:nvSpPr>
+        <p:spPr>
+          <a:xfrm>
+            <a:off x="2020824" y="4966716"/>
+            <a:ext cx="2012594" cy="292608"/>
+          </a:xfrm>
+          <a:prstGeom prst="rect">
+            <a:avLst/>
+          </a:prstGeom>
+          <a:noFill/>
+          <a:ln/>
+        </p:spPr>
+        <p:txBody>
+          <a:bodyPr wrap="square" rtlCol="0" anchor="t"/>
+          <a:lstStyle/>
+          <a:p>
+            <a:pPr algn="l" indent="0" marL="0">
+              <a:buNone/>
+            </a:pPr>
+            <a:r>
+              <a:rPr lang="en-US" sz="1300" b="1" dirty="0">
+                <a:solidFill>
+                  <a:srgbClr val="0F172A"/>
+                </a:solidFill>
+                <a:latin typeface="Malgun Gothic" pitchFamily="34" charset="0"/>
+                <a:ea typeface="Malgun Gothic" pitchFamily="34" charset="-122"/>
+                <a:cs typeface="Malgun Gothic" pitchFamily="34" charset="-120"/>
+              </a:rPr>
+              <a:t>케밥</a:t>
+            </a:r>
+            <a:endParaRPr lang="en-US" sz="1300" dirty="0"/>
+          </a:p>
+        </p:txBody>
+      </p:sp>
+      <p:sp>
+        <p:nvSpPr>
+          <p:cNvPr id="26" name="Text 17"/>
+          <p:cNvSpPr txBox="1"/>
+          <p:nvPr/>
+        </p:nvSpPr>
+        <p:spPr>
+          <a:xfrm>
+            <a:off x="2020824" y="5259324"/>
+            <a:ext cx="2012594" cy="1124712"/>
+          </a:xfrm>
+          <a:prstGeom prst="rect">
+            <a:avLst/>
+          </a:prstGeom>
+          <a:noFill/>
+          <a:ln/>
+        </p:spPr>
+        <p:txBody>
+          <a:bodyPr wrap="square" rtlCol="0" anchor="t"/>
+          <a:lstStyle/>
+          <a:p>
+            <a:pPr algn="l" indent="0" marL="0">
+              <a:lnSpc>
+                <a:spcPct val="120000"/>
+              </a:lnSpc>
+              <a:buNone/>
+            </a:pPr>
+            <a:r>
+              <a:rPr lang="en-US" sz="800" dirty="0">
+                <a:solidFill>
+                  <a:srgbClr val="475569"/>
+                </a:solidFill>
+                <a:latin typeface="Malgun Gothic" pitchFamily="34" charset="0"/>
+                <a:ea typeface="Malgun Gothic" pitchFamily="34" charset="-122"/>
+                <a:cs typeface="Malgun Gothic" pitchFamily="34" charset="-120"/>
+              </a:rPr>
+              <a:t>치킨·램 케밥. 한 손에 들고 먹는 형태라 대기 회전이 빠름</a:t>
+            </a:r>
+            <a:endParaRPr lang="en-US" sz="800" dirty="0"/>
+          </a:p>
+        </p:txBody>
+      </p:sp>
+      <p:pic>
+        <p:nvPicPr>
+          <p:cNvPr id="27" name="Image 7" descr="/home/user/Flitunion/docs/photos/foodtruck-menu/bulchobap.jpg">    </p:cNvPr>
+          <p:cNvPicPr>
+            <a:picLocks noChangeAspect="1"/>
+          </p:cNvPicPr>
+          <p:nvPr/>
+        </p:nvPicPr>
+        <p:blipFill>
+          <a:blip r:embed="rId8"/>
+          <a:stretch>
+            <a:fillRect/>
+          </a:stretch>
+        </p:blipFill>
+        <p:spPr>
+          <a:xfrm>
+            <a:off x="4307738" y="4966716"/>
+            <a:ext cx="1417320" cy="1417320"/>
+          </a:xfrm>
+          <a:prstGeom prst="rect">
+            <a:avLst/>
+          </a:prstGeom>
+        </p:spPr>
+      </p:pic>
+      <p:sp>
+        <p:nvSpPr>
+          <p:cNvPr id="28" name="Text 18"/>
+          <p:cNvSpPr txBox="1"/>
+          <p:nvPr/>
+        </p:nvSpPr>
+        <p:spPr>
+          <a:xfrm>
+            <a:off x="5871362" y="4966716"/>
+            <a:ext cx="2012594" cy="292608"/>
+          </a:xfrm>
+          <a:prstGeom prst="rect">
+            <a:avLst/>
+          </a:prstGeom>
+          <a:noFill/>
+          <a:ln/>
+        </p:spPr>
+        <p:txBody>
+          <a:bodyPr wrap="square" rtlCol="0" anchor="t"/>
+          <a:lstStyle/>
+          <a:p>
+            <a:pPr algn="l" indent="0" marL="0">
+              <a:buNone/>
+            </a:pPr>
+            <a:r>
+              <a:rPr lang="en-US" sz="1300" b="1" dirty="0">
+                <a:solidFill>
+                  <a:srgbClr val="0F172A"/>
+                </a:solidFill>
+                <a:latin typeface="Malgun Gothic" pitchFamily="34" charset="0"/>
+                <a:ea typeface="Malgun Gothic" pitchFamily="34" charset="-122"/>
+                <a:cs typeface="Malgun Gothic" pitchFamily="34" charset="-120"/>
+              </a:rPr>
+              <a:t>불초밥</a:t>
+            </a:r>
+            <a:endParaRPr lang="en-US" sz="1300" dirty="0"/>
+          </a:p>
+        </p:txBody>
+      </p:sp>
+      <p:sp>
+        <p:nvSpPr>
+          <p:cNvPr id="29" name="Text 19"/>
+          <p:cNvSpPr txBox="1"/>
+          <p:nvPr/>
+        </p:nvSpPr>
+        <p:spPr>
+          <a:xfrm>
+            <a:off x="5871362" y="5259324"/>
+            <a:ext cx="2012594" cy="1124712"/>
+          </a:xfrm>
+          <a:prstGeom prst="rect">
+            <a:avLst/>
+          </a:prstGeom>
+          <a:noFill/>
+          <a:ln/>
+        </p:spPr>
+        <p:txBody>
+          <a:bodyPr wrap="square" rtlCol="0" anchor="t"/>
+          <a:lstStyle/>
+          <a:p>
+            <a:pPr algn="l" indent="0" marL="0">
+              <a:lnSpc>
+                <a:spcPct val="120000"/>
+              </a:lnSpc>
+              <a:buNone/>
+            </a:pPr>
+            <a:r>
+              <a:rPr lang="en-US" sz="800" dirty="0">
+                <a:solidFill>
+                  <a:srgbClr val="475569"/>
+                </a:solidFill>
+                <a:latin typeface="Malgun Gothic" pitchFamily="34" charset="0"/>
+                <a:ea typeface="Malgun Gothic" pitchFamily="34" charset="-122"/>
+                <a:cs typeface="Malgun Gothic" pitchFamily="34" charset="-120"/>
+              </a:rPr>
+              <a:t>소고기 불초밥·연어초밥. 토치로 구워내는 과정이 그대로 노출됨</a:t>
+            </a:r>
+            <a:endParaRPr lang="en-US" sz="800" dirty="0"/>
+          </a:p>
+        </p:txBody>
+      </p:sp>
+      <p:pic>
+        <p:nvPicPr>
+          <p:cNvPr id="30" name="Image 8" descr="/home/user/Flitunion/docs/photos/foodtruck-menu/takoyaki.jpg">    </p:cNvPr>
+          <p:cNvPicPr>
+            <a:picLocks noChangeAspect="1"/>
+          </p:cNvPicPr>
+          <p:nvPr/>
+        </p:nvPicPr>
+        <p:blipFill>
+          <a:blip r:embed="rId9"/>
+          <a:stretch>
+            <a:fillRect/>
+          </a:stretch>
+        </p:blipFill>
+        <p:spPr>
+          <a:xfrm>
+            <a:off x="8158277" y="4966716"/>
+            <a:ext cx="1417320" cy="1417320"/>
+          </a:xfrm>
+          <a:prstGeom prst="rect">
+            <a:avLst/>
+          </a:prstGeom>
+        </p:spPr>
+      </p:pic>
+      <p:sp>
+        <p:nvSpPr>
+          <p:cNvPr id="31" name="Text 20"/>
+          <p:cNvSpPr txBox="1"/>
+          <p:nvPr/>
+        </p:nvSpPr>
+        <p:spPr>
+          <a:xfrm>
+            <a:off x="9721901" y="4966716"/>
+            <a:ext cx="2012594" cy="292608"/>
+          </a:xfrm>
+          <a:prstGeom prst="rect">
+            <a:avLst/>
+          </a:prstGeom>
+          <a:noFill/>
+          <a:ln/>
+        </p:spPr>
+        <p:txBody>
+          <a:bodyPr wrap="square" rtlCol="0" anchor="t"/>
+          <a:lstStyle/>
+          <a:p>
+            <a:pPr algn="l" indent="0" marL="0">
+              <a:buNone/>
+            </a:pPr>
+            <a:r>
+              <a:rPr lang="en-US" sz="1300" b="1" dirty="0">
+                <a:solidFill>
+                  <a:srgbClr val="0F172A"/>
+                </a:solidFill>
+                <a:latin typeface="Malgun Gothic" pitchFamily="34" charset="0"/>
+                <a:ea typeface="Malgun Gothic" pitchFamily="34" charset="-122"/>
+                <a:cs typeface="Malgun Gothic" pitchFamily="34" charset="-120"/>
+              </a:rPr>
+              <a:t>타코야끼</a:t>
+            </a:r>
+            <a:endParaRPr lang="en-US" sz="1300" dirty="0"/>
+          </a:p>
+        </p:txBody>
+      </p:sp>
+      <p:sp>
+        <p:nvSpPr>
+          <p:cNvPr id="32" name="Text 21"/>
+          <p:cNvSpPr txBox="1"/>
+          <p:nvPr/>
+        </p:nvSpPr>
+        <p:spPr>
+          <a:xfrm>
+            <a:off x="9721901" y="5259324"/>
+            <a:ext cx="2012594" cy="1124712"/>
+          </a:xfrm>
+          <a:prstGeom prst="rect">
+            <a:avLst/>
+          </a:prstGeom>
+          <a:noFill/>
+          <a:ln/>
+        </p:spPr>
+        <p:txBody>
+          <a:bodyPr wrap="square" rtlCol="0" anchor="t"/>
+          <a:lstStyle/>
+          <a:p>
+            <a:pPr algn="l" indent="0" marL="0">
+              <a:lnSpc>
+                <a:spcPct val="120000"/>
+              </a:lnSpc>
+              <a:buNone/>
+            </a:pPr>
+            <a:r>
+              <a:rPr lang="en-US" sz="800" dirty="0">
+                <a:solidFill>
+                  <a:srgbClr val="475569"/>
+                </a:solidFill>
+                <a:latin typeface="Malgun Gothic" pitchFamily="34" charset="0"/>
+                <a:ea typeface="Malgun Gothic" pitchFamily="34" charset="-122"/>
+                <a:cs typeface="Malgun Gothic" pitchFamily="34" charset="-120"/>
+              </a:rPr>
+              <a:t>오리지널·매운맛. 조리 과정이 보여 대기줄이 그림이 되는 품목</a:t>
+            </a:r>
+            <a:endParaRPr lang="en-US" sz="800" dirty="0"/>
+          </a:p>
+        </p:txBody>
+      </p:sp>
+      <p:sp>
+        <p:nvSpPr>
+          <p:cNvPr id="33" name="Text 22"/>
+          <p:cNvSpPr txBox="1"/>
+          <p:nvPr/>
+        </p:nvSpPr>
+        <p:spPr>
+          <a:xfrm>
+            <a:off x="457200" y="6492240"/>
+            <a:ext cx="10637215" cy="274320"/>
+          </a:xfrm>
+          <a:prstGeom prst="rect">
+            <a:avLst/>
+          </a:prstGeom>
+          <a:noFill/>
+          <a:ln/>
+        </p:spPr>
+        <p:txBody>
+          <a:bodyPr wrap="square" rtlCol="0" anchor="t"/>
+          <a:lstStyle/>
+          <a:p>
+            <a:pPr algn="l" indent="0" marL="0">
+              <a:buNone/>
+            </a:pPr>
+            <a:r>
+              <a:rPr lang="en-US" sz="750" dirty="0">
+                <a:solidFill>
+                  <a:srgbClr val="94A3B8"/>
+                </a:solidFill>
+                <a:latin typeface="Malgun Gothic" pitchFamily="34" charset="0"/>
+                <a:ea typeface="Malgun Gothic" pitchFamily="34" charset="-122"/>
+                <a:cs typeface="Malgun Gothic" pitchFamily="34" charset="-120"/>
+              </a:rPr>
+              <a:t>플릿 유니온 · www.flitunion.com</a:t>
+            </a:r>
+            <a:endParaRPr lang="en-US" sz="750" dirty="0"/>
+          </a:p>
+        </p:txBody>
+      </p:sp>
+      <p:sp>
+        <p:nvSpPr>
+          <p:cNvPr id="34" name="Text 23"/>
+          <p:cNvSpPr txBox="1"/>
+          <p:nvPr/>
+        </p:nvSpPr>
+        <p:spPr>
+          <a:xfrm>
+            <a:off x="457200" y="6492240"/>
+            <a:ext cx="11277295" cy="274320"/>
           </a:xfrm>
           <a:prstGeom prst="rect">
             <a:avLst/>
@@ -1937,11 +2202,11 @@
           <a:bodyPr wrap="square" rtlCol="0" anchor="ctr"/>
           <a:lstStyle/>
           <a:p>
-            <a:pPr algn="l" indent="0" marL="0">
-              <a:buNone/>
-            </a:pPr>
-            <a:r>
-              <a:rPr lang="en-US" sz="800" dirty="0">
+            <a:pPr algn="r" indent="0" marL="0">
+              <a:buNone/>
+            </a:pPr>
+            <a:r>
+              <a:rPr lang="en-US" sz="750" dirty="0">
                 <a:solidFill>
                   <a:srgbClr val="94A3B8"/>
                 </a:solidFill>
@@ -1949,48 +2214,9 @@
                 <a:ea typeface="Malgun Gothic" pitchFamily="34" charset="-122"/>
                 <a:cs typeface="Malgun Gothic" pitchFamily="34" charset="-120"/>
               </a:rPr>
-              <a:t>플릿 유니온 · www.flitunion.com</a:t>
-            </a:r>
-            <a:endParaRPr lang="en-US" sz="800" dirty="0"/>
-          </a:p>
-        </p:txBody>
-      </p:sp>
-      <p:sp>
-        <p:nvSpPr>
-          <p:cNvPr id="25" name="Text 17"/>
-          <p:cNvSpPr txBox="1"/>
-          <p:nvPr/>
-        </p:nvSpPr>
-        <p:spPr>
-          <a:xfrm>
-            <a:off x="566928" y="10122408"/>
-            <a:ext cx="6428232" cy="274320"/>
-          </a:xfrm>
-          <a:prstGeom prst="rect">
-            <a:avLst/>
-          </a:prstGeom>
-          <a:noFill/>
-          <a:ln/>
-        </p:spPr>
-        <p:txBody>
-          <a:bodyPr wrap="square" rtlCol="0" anchor="ctr"/>
-          <a:lstStyle/>
-          <a:p>
-            <a:pPr algn="r" indent="0" marL="0">
-              <a:buNone/>
-            </a:pPr>
-            <a:r>
-              <a:rPr lang="en-US" sz="800" dirty="0">
-                <a:solidFill>
-                  <a:srgbClr val="94A3B8"/>
-                </a:solidFill>
-                <a:latin typeface="Malgun Gothic" pitchFamily="34" charset="0"/>
-                <a:ea typeface="Malgun Gothic" pitchFamily="34" charset="-122"/>
-                <a:cs typeface="Malgun Gothic" pitchFamily="34" charset="-120"/>
-              </a:rPr>
-              <a:t>1 / 4</a:t>
-            </a:r>
-            <a:endParaRPr lang="en-US" sz="800" dirty="0"/>
+              <a:t>1 / 3</a:t>
+            </a:r>
+            <a:endParaRPr lang="en-US" sz="750" dirty="0"/>
           </a:p>
         </p:txBody>
       </p:sp>
@@ -2034,8 +2260,8 @@
         </p:nvSpPr>
         <p:spPr>
           <a:xfrm>
-            <a:off x="0" y="566928"/>
-            <a:ext cx="7562088" cy="566928"/>
+            <a:off x="0" y="201168"/>
+            <a:ext cx="12191695" cy="274320"/>
           </a:xfrm>
           <a:prstGeom prst="rect">
             <a:avLst/>
@@ -2051,7 +2277,7 @@
               <a:buNone/>
             </a:pPr>
             <a:r>
-              <a:rPr lang="en-US" sz="3400" b="1" spc="100" kern="0" dirty="0">
+              <a:rPr lang="en-US" sz="1600" b="1" spc="100" kern="0" dirty="0">
                 <a:solidFill>
                   <a:srgbClr val="3182F6"/>
                 </a:solidFill>
@@ -2061,7 +2287,7 @@
               </a:rPr>
               <a:t>플릿 유니온</a:t>
             </a:r>
-            <a:endParaRPr lang="en-US" sz="3400" dirty="0"/>
+            <a:endParaRPr lang="en-US" sz="1600" dirty="0"/>
           </a:p>
         </p:txBody>
       </p:sp>
@@ -2073,8 +2299,8 @@
         </p:nvSpPr>
         <p:spPr>
           <a:xfrm>
-            <a:off x="0" y="1078992"/>
-            <a:ext cx="7562088" cy="713232"/>
+            <a:off x="0" y="457200"/>
+            <a:ext cx="12191695" cy="457200"/>
           </a:xfrm>
           <a:prstGeom prst="rect">
             <a:avLst/>
@@ -2090,7 +2316,7 @@
               <a:buNone/>
             </a:pPr>
             <a:r>
-              <a:rPr lang="en-US" sz="4400" b="1" dirty="0">
+              <a:rPr lang="en-US" sz="2800" b="1" dirty="0">
                 <a:solidFill>
                   <a:srgbClr val="0B1F44"/>
                 </a:solidFill>
@@ -2100,7 +2326,7 @@
               </a:rPr>
               <a:t>푸드트럭 메뉴</a:t>
             </a:r>
-            <a:endParaRPr lang="en-US" sz="4400" dirty="0"/>
+            <a:endParaRPr lang="en-US" sz="2800" dirty="0"/>
           </a:p>
         </p:txBody>
       </p:sp>
@@ -2112,8 +2338,8 @@
         </p:nvSpPr>
         <p:spPr>
           <a:xfrm>
-            <a:off x="1220724" y="1847088"/>
-            <a:ext cx="5120640" cy="402336"/>
+            <a:off x="3809848" y="932688"/>
+            <a:ext cx="4572000" cy="310896"/>
           </a:xfrm>
           <a:prstGeom prst="roundRect">
             <a:avLst>
@@ -2139,8 +2365,8 @@
         </p:nvSpPr>
         <p:spPr>
           <a:xfrm>
-            <a:off x="1220724" y="1847088"/>
-            <a:ext cx="5120640" cy="402336"/>
+            <a:off x="3809848" y="932688"/>
+            <a:ext cx="4572000" cy="310896"/>
           </a:xfrm>
           <a:prstGeom prst="rect">
             <a:avLst/>
@@ -2156,7 +2382,7 @@
               <a:buNone/>
             </a:pPr>
             <a:r>
-              <a:rPr lang="en-US" sz="1300" b="1" dirty="0">
+              <a:rPr lang="en-US" sz="1100" b="1" dirty="0">
                 <a:solidFill>
                   <a:srgbClr val="0B1F44"/>
                 </a:solidFill>
@@ -2164,15 +2390,15 @@
                 <a:ea typeface="Malgun Gothic" pitchFamily="34" charset="-122"/>
                 <a:cs typeface="Malgun Gothic" pitchFamily="34" charset="-120"/>
               </a:rPr>
-              <a:t>· 식사류 — 일식 · 아시안 · 디저트 ·</a:t>
-            </a:r>
-            <a:endParaRPr lang="en-US" sz="1300" dirty="0"/>
+              <a:t>· 디저트 · 음료 · 간식 ·</a:t>
+            </a:r>
+            <a:endParaRPr lang="en-US" sz="1100" dirty="0"/>
           </a:p>
         </p:txBody>
       </p:sp>
       <p:pic>
         <p:nvPicPr>
-          <p:cNvPr id="6" name="Image 0" descr="/tmp/claude-0/-home-user/0916ad07-ee04-5cb5-987c-27fb9c83eb46/scratchpad/catalog/ft/kebab.jpg">    </p:cNvPr>
+          <p:cNvPr id="6" name="Image 0" descr="/home/user/Flitunion/docs/photos/foodtruck-menu/takoazit.jpg">    </p:cNvPr>
           <p:cNvPicPr>
             <a:picLocks noChangeAspect="1"/>
           </p:cNvPicPr>
@@ -2186,8 +2412,8 @@
         </p:blipFill>
         <p:spPr>
           <a:xfrm>
-            <a:off x="566928" y="2395728"/>
-            <a:ext cx="1972056" cy="1972056"/>
+            <a:off x="457200" y="1443228"/>
+            <a:ext cx="1417320" cy="1417320"/>
           </a:xfrm>
           <a:prstGeom prst="rect">
             <a:avLst/>
@@ -2202,8 +2428,8 @@
         </p:nvSpPr>
         <p:spPr>
           <a:xfrm>
-            <a:off x="566928" y="4477512"/>
-            <a:ext cx="1972056" cy="384048"/>
+            <a:off x="2020824" y="1443228"/>
+            <a:ext cx="2012594" cy="292608"/>
           </a:xfrm>
           <a:prstGeom prst="rect">
             <a:avLst/>
@@ -2219,7 +2445,7 @@
               <a:buNone/>
             </a:pPr>
             <a:r>
-              <a:rPr lang="en-US" sz="1500" b="1" dirty="0">
+              <a:rPr lang="en-US" sz="1300" b="1" dirty="0">
                 <a:solidFill>
                   <a:srgbClr val="0F172A"/>
                 </a:solidFill>
@@ -2227,9 +2453,9 @@
                 <a:ea typeface="Malgun Gothic" pitchFamily="34" charset="-122"/>
                 <a:cs typeface="Malgun Gothic" pitchFamily="34" charset="-120"/>
               </a:rPr>
-              <a:t>케밥</a:t>
-            </a:r>
-            <a:endParaRPr lang="en-US" sz="1500" dirty="0"/>
+              <a:t>오코노미야끼</a:t>
+            </a:r>
+            <a:endParaRPr lang="en-US" sz="1300" dirty="0"/>
           </a:p>
         </p:txBody>
       </p:sp>
@@ -2241,8 +2467,8 @@
         </p:nvSpPr>
         <p:spPr>
           <a:xfrm>
-            <a:off x="566928" y="4861560"/>
-            <a:ext cx="1972056" cy="960120"/>
+            <a:off x="2020824" y="1735836"/>
+            <a:ext cx="2012594" cy="1124712"/>
           </a:xfrm>
           <a:prstGeom prst="rect">
             <a:avLst/>
@@ -2256,12 +2482,12 @@
           <a:p>
             <a:pPr algn="l" indent="0" marL="0">
               <a:lnSpc>
-                <a:spcPct val="124000"/>
+                <a:spcPct val="120000"/>
               </a:lnSpc>
               <a:buNone/>
             </a:pPr>
             <a:r>
-              <a:rPr lang="en-US" sz="950" dirty="0">
+              <a:rPr lang="en-US" sz="800" dirty="0">
                 <a:solidFill>
                   <a:srgbClr val="475569"/>
                 </a:solidFill>
@@ -2269,15 +2495,15 @@
                 <a:ea typeface="Malgun Gothic" pitchFamily="34" charset="-122"/>
                 <a:cs typeface="Malgun Gothic" pitchFamily="34" charset="-120"/>
               </a:rPr>
-              <a:t>치킨·램 케밥. 한 손에 들고 먹는 형태라 대기 회전이 빠름</a:t>
-            </a:r>
-            <a:endParaRPr lang="en-US" sz="950" dirty="0"/>
+              <a:t>철판에 부쳐내는 오코노미야끼. 타코야끼와 함께 운영 가능</a:t>
+            </a:r>
+            <a:endParaRPr lang="en-US" sz="800" dirty="0"/>
           </a:p>
         </p:txBody>
       </p:sp>
       <p:pic>
         <p:nvPicPr>
-          <p:cNvPr id="9" name="Image 1" descr="/tmp/claude-0/-home-user/0916ad07-ee04-5cb5-987c-27fb9c83eb46/scratchpad/catalog/ft/bulchobap.jpg">    </p:cNvPr>
+          <p:cNvPr id="9" name="Image 1" descr="/home/user/Flitunion/docs/photos/foodtruck-menu/shasha-crepe.jpg">    </p:cNvPr>
           <p:cNvPicPr>
             <a:picLocks noChangeAspect="1"/>
           </p:cNvPicPr>
@@ -2291,8 +2517,8 @@
         </p:blipFill>
         <p:spPr>
           <a:xfrm>
-            <a:off x="2795016" y="2395728"/>
-            <a:ext cx="1972056" cy="1972056"/>
+            <a:off x="4307738" y="1443228"/>
+            <a:ext cx="1417320" cy="1417320"/>
           </a:xfrm>
           <a:prstGeom prst="rect">
             <a:avLst/>
@@ -2307,8 +2533,8 @@
         </p:nvSpPr>
         <p:spPr>
           <a:xfrm>
-            <a:off x="2795016" y="4477512"/>
-            <a:ext cx="1972056" cy="384048"/>
+            <a:off x="5871362" y="1443228"/>
+            <a:ext cx="2012594" cy="292608"/>
           </a:xfrm>
           <a:prstGeom prst="rect">
             <a:avLst/>
@@ -2324,7 +2550,7 @@
               <a:buNone/>
             </a:pPr>
             <a:r>
-              <a:rPr lang="en-US" sz="1500" b="1" dirty="0">
+              <a:rPr lang="en-US" sz="1300" b="1" dirty="0">
                 <a:solidFill>
                   <a:srgbClr val="0F172A"/>
                 </a:solidFill>
@@ -2332,9 +2558,9 @@
                 <a:ea typeface="Malgun Gothic" pitchFamily="34" charset="-122"/>
                 <a:cs typeface="Malgun Gothic" pitchFamily="34" charset="-120"/>
               </a:rPr>
-              <a:t>불초밥</a:t>
-            </a:r>
-            <a:endParaRPr lang="en-US" sz="1500" dirty="0"/>
+              <a:t>크레페</a:t>
+            </a:r>
+            <a:endParaRPr lang="en-US" sz="1300" dirty="0"/>
           </a:p>
         </p:txBody>
       </p:sp>
@@ -2346,8 +2572,8 @@
         </p:nvSpPr>
         <p:spPr>
           <a:xfrm>
-            <a:off x="2795016" y="4861560"/>
-            <a:ext cx="1972056" cy="960120"/>
+            <a:off x="5871362" y="1735836"/>
+            <a:ext cx="2012594" cy="1124712"/>
           </a:xfrm>
           <a:prstGeom prst="rect">
             <a:avLst/>
@@ -2361,12 +2587,12 @@
           <a:p>
             <a:pPr algn="l" indent="0" marL="0">
               <a:lnSpc>
-                <a:spcPct val="124000"/>
+                <a:spcPct val="120000"/>
               </a:lnSpc>
               <a:buNone/>
             </a:pPr>
             <a:r>
-              <a:rPr lang="en-US" sz="950" dirty="0">
+              <a:rPr lang="en-US" sz="800" dirty="0">
                 <a:solidFill>
                   <a:srgbClr val="475569"/>
                 </a:solidFill>
@@ -2374,15 +2600,15 @@
                 <a:ea typeface="Malgun Gothic" pitchFamily="34" charset="-122"/>
                 <a:cs typeface="Malgun Gothic" pitchFamily="34" charset="-120"/>
               </a:rPr>
-              <a:t>소고기 불초밥·연어초밥. 토치로 구워내는 과정이 그대로 노출됨</a:t>
-            </a:r>
-            <a:endParaRPr lang="en-US" sz="950" dirty="0"/>
+              <a:t>생크림·과일 크레페와 크레페 파르페. 디저트 라인 대표 메뉴</a:t>
+            </a:r>
+            <a:endParaRPr lang="en-US" sz="800" dirty="0"/>
           </a:p>
         </p:txBody>
       </p:sp>
       <p:pic>
         <p:nvPicPr>
-          <p:cNvPr id="12" name="Image 2" descr="/tmp/claude-0/-home-user/0916ad07-ee04-5cb5-987c-27fb9c83eb46/scratchpad/catalog/ft/takoyaki.jpg">    </p:cNvPr>
+          <p:cNvPr id="12" name="Image 2" descr="/home/user/Flitunion/docs/photos/foodtruck-menu/churros.jpg">    </p:cNvPr>
           <p:cNvPicPr>
             <a:picLocks noChangeAspect="1"/>
           </p:cNvPicPr>
@@ -2396,8 +2622,8 @@
         </p:blipFill>
         <p:spPr>
           <a:xfrm>
-            <a:off x="5023104" y="2395728"/>
-            <a:ext cx="1972056" cy="1972056"/>
+            <a:off x="8158277" y="1443228"/>
+            <a:ext cx="1417320" cy="1417320"/>
           </a:xfrm>
           <a:prstGeom prst="rect">
             <a:avLst/>
@@ -2412,8 +2638,8 @@
         </p:nvSpPr>
         <p:spPr>
           <a:xfrm>
-            <a:off x="5023104" y="4477512"/>
-            <a:ext cx="1972056" cy="384048"/>
+            <a:off x="9721901" y="1443228"/>
+            <a:ext cx="2012594" cy="292608"/>
           </a:xfrm>
           <a:prstGeom prst="rect">
             <a:avLst/>
@@ -2429,7 +2655,7 @@
               <a:buNone/>
             </a:pPr>
             <a:r>
-              <a:rPr lang="en-US" sz="1500" b="1" dirty="0">
+              <a:rPr lang="en-US" sz="1300" b="1" dirty="0">
                 <a:solidFill>
                   <a:srgbClr val="0F172A"/>
                 </a:solidFill>
@@ -2437,9 +2663,9 @@
                 <a:ea typeface="Malgun Gothic" pitchFamily="34" charset="-122"/>
                 <a:cs typeface="Malgun Gothic" pitchFamily="34" charset="-120"/>
               </a:rPr>
-              <a:t>타코야끼</a:t>
-            </a:r>
-            <a:endParaRPr lang="en-US" sz="1500" dirty="0"/>
+              <a:t>츄러스</a:t>
+            </a:r>
+            <a:endParaRPr lang="en-US" sz="1300" dirty="0"/>
           </a:p>
         </p:txBody>
       </p:sp>
@@ -2451,8 +2677,8 @@
         </p:nvSpPr>
         <p:spPr>
           <a:xfrm>
-            <a:off x="5023104" y="4861560"/>
-            <a:ext cx="1972056" cy="960120"/>
+            <a:off x="9721901" y="1735836"/>
+            <a:ext cx="2012594" cy="1124712"/>
           </a:xfrm>
           <a:prstGeom prst="rect">
             <a:avLst/>
@@ -2466,12 +2692,12 @@
           <a:p>
             <a:pPr algn="l" indent="0" marL="0">
               <a:lnSpc>
-                <a:spcPct val="124000"/>
+                <a:spcPct val="120000"/>
               </a:lnSpc>
               <a:buNone/>
             </a:pPr>
             <a:r>
-              <a:rPr lang="en-US" sz="950" dirty="0">
+              <a:rPr lang="en-US" sz="800" dirty="0">
                 <a:solidFill>
                   <a:srgbClr val="475569"/>
                 </a:solidFill>
@@ -2479,15 +2705,15 @@
                 <a:ea typeface="Malgun Gothic" pitchFamily="34" charset="-122"/>
                 <a:cs typeface="Malgun Gothic" pitchFamily="34" charset="-120"/>
               </a:rPr>
-              <a:t>오리지널·매운맛. 조리 과정이 보여 대기줄이 그림이 되는 품목</a:t>
-            </a:r>
-            <a:endParaRPr lang="en-US" sz="950" dirty="0"/>
+              <a:t>츄러스와 아이스크림 츄러스. 아이 동반 가족 대응</a:t>
+            </a:r>
+            <a:endParaRPr lang="en-US" sz="800" dirty="0"/>
           </a:p>
         </p:txBody>
       </p:sp>
       <p:pic>
         <p:nvPicPr>
-          <p:cNvPr id="15" name="Image 3" descr="/tmp/claude-0/-home-user/0916ad07-ee04-5cb5-987c-27fb9c83eb46/scratchpad/catalog/ft/takoazit.jpg">    </p:cNvPr>
+          <p:cNvPr id="15" name="Image 3" descr="/home/user/Flitunion/docs/photos/foodtruck-menu/chan-cafe.jpg">    </p:cNvPr>
           <p:cNvPicPr>
             <a:picLocks noChangeAspect="1"/>
           </p:cNvPicPr>
@@ -2501,8 +2727,8 @@
         </p:blipFill>
         <p:spPr>
           <a:xfrm>
-            <a:off x="566928" y="6150864"/>
-            <a:ext cx="1972056" cy="1972056"/>
+            <a:off x="457200" y="3204972"/>
+            <a:ext cx="1417320" cy="1417320"/>
           </a:xfrm>
           <a:prstGeom prst="rect">
             <a:avLst/>
@@ -2517,8 +2743,8 @@
         </p:nvSpPr>
         <p:spPr>
           <a:xfrm>
-            <a:off x="566928" y="8232648"/>
-            <a:ext cx="1972056" cy="384048"/>
+            <a:off x="2020824" y="3204972"/>
+            <a:ext cx="2012594" cy="292608"/>
           </a:xfrm>
           <a:prstGeom prst="rect">
             <a:avLst/>
@@ -2534,7 +2760,7 @@
               <a:buNone/>
             </a:pPr>
             <a:r>
-              <a:rPr lang="en-US" sz="1500" b="1" dirty="0">
+              <a:rPr lang="en-US" sz="1300" b="1" dirty="0">
                 <a:solidFill>
                   <a:srgbClr val="0F172A"/>
                 </a:solidFill>
@@ -2542,9 +2768,9 @@
                 <a:ea typeface="Malgun Gothic" pitchFamily="34" charset="-122"/>
                 <a:cs typeface="Malgun Gothic" pitchFamily="34" charset="-120"/>
               </a:rPr>
-              <a:t>오코노미야끼</a:t>
-            </a:r>
-            <a:endParaRPr lang="en-US" sz="1500" dirty="0"/>
+              <a:t>커피 · 에이드</a:t>
+            </a:r>
+            <a:endParaRPr lang="en-US" sz="1300" dirty="0"/>
           </a:p>
         </p:txBody>
       </p:sp>
@@ -2556,8 +2782,8 @@
         </p:nvSpPr>
         <p:spPr>
           <a:xfrm>
-            <a:off x="566928" y="8616696"/>
-            <a:ext cx="1972056" cy="960120"/>
+            <a:off x="2020824" y="3497580"/>
+            <a:ext cx="2012594" cy="1124712"/>
           </a:xfrm>
           <a:prstGeom prst="rect">
             <a:avLst/>
@@ -2571,12 +2797,12 @@
           <a:p>
             <a:pPr algn="l" indent="0" marL="0">
               <a:lnSpc>
-                <a:spcPct val="124000"/>
+                <a:spcPct val="120000"/>
               </a:lnSpc>
               <a:buNone/>
             </a:pPr>
             <a:r>
-              <a:rPr lang="en-US" sz="950" dirty="0">
+              <a:rPr lang="en-US" sz="800" dirty="0">
                 <a:solidFill>
                   <a:srgbClr val="475569"/>
                 </a:solidFill>
@@ -2584,46 +2810,86 @@
                 <a:ea typeface="Malgun Gothic" pitchFamily="34" charset="-122"/>
                 <a:cs typeface="Malgun Gothic" pitchFamily="34" charset="-120"/>
               </a:rPr>
-              <a:t>철판에 부쳐내는 오코노미야끼. 타코야끼와 함께 운영 가능</a:t>
-            </a:r>
-            <a:endParaRPr lang="en-US" sz="950" dirty="0"/>
-          </a:p>
-        </p:txBody>
-      </p:sp>
-      <p:pic>
-        <p:nvPicPr>
-          <p:cNvPr id="18" name="Image 4" descr="/tmp/claude-0/-home-user/0916ad07-ee04-5cb5-987c-27fb9c83eb46/scratchpad/catalog/ft/shasha-crepe.jpg">    </p:cNvPr>
-          <p:cNvPicPr>
-            <a:picLocks noChangeAspect="1"/>
-          </p:cNvPicPr>
-          <p:nvPr/>
-        </p:nvPicPr>
-        <p:blipFill>
-          <a:blip r:embed="rId5"/>
-          <a:stretch>
-            <a:fillRect/>
-          </a:stretch>
-        </p:blipFill>
-        <p:spPr>
-          <a:xfrm>
-            <a:off x="2795016" y="6150864"/>
-            <a:ext cx="1972056" cy="1972056"/>
-          </a:xfrm>
-          <a:prstGeom prst="rect">
-            <a:avLst/>
-          </a:prstGeom>
-        </p:spPr>
-      </p:pic>
-      <p:sp>
-        <p:nvSpPr>
-          <p:cNvPr id="19" name="Text 12"/>
-          <p:cNvSpPr txBox="1"/>
-          <p:nvPr/>
-        </p:nvSpPr>
-        <p:spPr>
-          <a:xfrm>
-            <a:off x="2795016" y="8232648"/>
-            <a:ext cx="1972056" cy="384048"/>
+              <a:t>아메리카노·에이드·스무디. 체류 시간을 늘리는 필수 구성</a:t>
+            </a:r>
+            <a:endParaRPr lang="en-US" sz="800" dirty="0"/>
+          </a:p>
+        </p:txBody>
+      </p:sp>
+      <p:sp>
+        <p:nvSpPr>
+          <p:cNvPr id="18" name="Shape 12"/>
+          <p:cNvSpPr/>
+          <p:nvPr/>
+        </p:nvSpPr>
+        <p:spPr>
+          <a:xfrm>
+            <a:off x="4307738" y="3204972"/>
+            <a:ext cx="1417320" cy="1417320"/>
+          </a:xfrm>
+          <a:prstGeom prst="rect">
+            <a:avLst/>
+          </a:prstGeom>
+          <a:solidFill>
+            <a:srgbClr val="F4F7FC"/>
+          </a:solidFill>
+          <a:ln w="12700">
+            <a:solidFill>
+              <a:srgbClr val="DBE6F6"/>
+            </a:solidFill>
+            <a:prstDash val="solid"/>
+          </a:ln>
+        </p:spPr>
+      </p:sp>
+      <p:sp>
+        <p:nvSpPr>
+          <p:cNvPr id="19" name="Text 13"/>
+          <p:cNvSpPr txBox="1"/>
+          <p:nvPr/>
+        </p:nvSpPr>
+        <p:spPr>
+          <a:xfrm>
+            <a:off x="4307738" y="3749040"/>
+            <a:ext cx="1417320" cy="329184"/>
+          </a:xfrm>
+          <a:prstGeom prst="rect">
+            <a:avLst/>
+          </a:prstGeom>
+          <a:noFill/>
+          <a:ln/>
+        </p:spPr>
+        <p:txBody>
+          <a:bodyPr wrap="square" rtlCol="0" anchor="ctr"/>
+          <a:lstStyle/>
+          <a:p>
+            <a:pPr algn="ctr" indent="0" marL="0">
+              <a:buNone/>
+            </a:pPr>
+            <a:r>
+              <a:rPr lang="en-US" sz="900" dirty="0">
+                <a:solidFill>
+                  <a:srgbClr val="94A3B8"/>
+                </a:solidFill>
+                <a:latin typeface="Malgun Gothic" pitchFamily="34" charset="0"/>
+                <a:ea typeface="Malgun Gothic" pitchFamily="34" charset="-122"/>
+                <a:cs typeface="Malgun Gothic" pitchFamily="34" charset="-120"/>
+              </a:rPr>
+              <a:t>사진 준비 중</a:t>
+            </a:r>
+            <a:endParaRPr lang="en-US" sz="900" dirty="0"/>
+          </a:p>
+        </p:txBody>
+      </p:sp>
+      <p:sp>
+        <p:nvSpPr>
+          <p:cNvPr id="20" name="Text 14"/>
+          <p:cNvSpPr txBox="1"/>
+          <p:nvPr/>
+        </p:nvSpPr>
+        <p:spPr>
+          <a:xfrm>
+            <a:off x="5871362" y="3204972"/>
+            <a:ext cx="2012594" cy="292608"/>
           </a:xfrm>
           <a:prstGeom prst="rect">
             <a:avLst/>
@@ -2639,7 +2905,7 @@
               <a:buNone/>
             </a:pPr>
             <a:r>
-              <a:rPr lang="en-US" sz="1500" b="1" dirty="0">
+              <a:rPr lang="en-US" sz="1300" b="1" dirty="0">
                 <a:solidFill>
                   <a:srgbClr val="0F172A"/>
                 </a:solidFill>
@@ -2647,22 +2913,22 @@
                 <a:ea typeface="Malgun Gothic" pitchFamily="34" charset="-122"/>
                 <a:cs typeface="Malgun Gothic" pitchFamily="34" charset="-120"/>
               </a:rPr>
-              <a:t>크레페</a:t>
-            </a:r>
-            <a:endParaRPr lang="en-US" sz="1500" dirty="0"/>
-          </a:p>
-        </p:txBody>
-      </p:sp>
-      <p:sp>
-        <p:nvSpPr>
-          <p:cNvPr id="20" name="Text 13"/>
-          <p:cNvSpPr txBox="1"/>
-          <p:nvPr/>
-        </p:nvSpPr>
-        <p:spPr>
-          <a:xfrm>
-            <a:off x="2795016" y="8616696"/>
-            <a:ext cx="1972056" cy="960120"/>
+              <a:t>우동</a:t>
+            </a:r>
+            <a:endParaRPr lang="en-US" sz="1300" dirty="0"/>
+          </a:p>
+        </p:txBody>
+      </p:sp>
+      <p:sp>
+        <p:nvSpPr>
+          <p:cNvPr id="21" name="Text 15"/>
+          <p:cNvSpPr txBox="1"/>
+          <p:nvPr/>
+        </p:nvSpPr>
+        <p:spPr>
+          <a:xfrm>
+            <a:off x="5871362" y="3497580"/>
+            <a:ext cx="2012594" cy="1124712"/>
           </a:xfrm>
           <a:prstGeom prst="rect">
             <a:avLst/>
@@ -2676,12 +2942,12 @@
           <a:p>
             <a:pPr algn="l" indent="0" marL="0">
               <a:lnSpc>
-                <a:spcPct val="124000"/>
+                <a:spcPct val="120000"/>
               </a:lnSpc>
               <a:buNone/>
             </a:pPr>
             <a:r>
-              <a:rPr lang="en-US" sz="950" dirty="0">
+              <a:rPr lang="en-US" sz="800" dirty="0">
                 <a:solidFill>
                   <a:srgbClr val="475569"/>
                 </a:solidFill>
@@ -2689,46 +2955,86 @@
                 <a:ea typeface="Malgun Gothic" pitchFamily="34" charset="-122"/>
                 <a:cs typeface="Malgun Gothic" pitchFamily="34" charset="-120"/>
               </a:rPr>
-              <a:t>생크림·과일 크레페와 크레페 파르페. 디저트 라인 대표 메뉴</a:t>
-            </a:r>
-            <a:endParaRPr lang="en-US" sz="950" dirty="0"/>
-          </a:p>
-        </p:txBody>
-      </p:sp>
-      <p:pic>
-        <p:nvPicPr>
-          <p:cNvPr id="21" name="Image 5" descr="/tmp/claude-0/-home-user/0916ad07-ee04-5cb5-987c-27fb9c83eb46/scratchpad/catalog/ft/churros.jpg">    </p:cNvPr>
-          <p:cNvPicPr>
-            <a:picLocks noChangeAspect="1"/>
-          </p:cNvPicPr>
-          <p:nvPr/>
-        </p:nvPicPr>
-        <p:blipFill>
-          <a:blip r:embed="rId6"/>
-          <a:stretch>
-            <a:fillRect/>
-          </a:stretch>
-        </p:blipFill>
-        <p:spPr>
-          <a:xfrm>
-            <a:off x="5023104" y="6150864"/>
-            <a:ext cx="1972056" cy="1972056"/>
-          </a:xfrm>
-          <a:prstGeom prst="rect">
-            <a:avLst/>
-          </a:prstGeom>
-        </p:spPr>
-      </p:pic>
-      <p:sp>
-        <p:nvSpPr>
-          <p:cNvPr id="22" name="Text 14"/>
-          <p:cNvSpPr txBox="1"/>
-          <p:nvPr/>
-        </p:nvSpPr>
-        <p:spPr>
-          <a:xfrm>
-            <a:off x="5023104" y="8232648"/>
-            <a:ext cx="1972056" cy="384048"/>
+              <a:t>기본 우동·김치우동·튀김우동. 저녁 시간대와 추운 계절에 강함</a:t>
+            </a:r>
+            <a:endParaRPr lang="en-US" sz="800" dirty="0"/>
+          </a:p>
+        </p:txBody>
+      </p:sp>
+      <p:sp>
+        <p:nvSpPr>
+          <p:cNvPr id="22" name="Shape 16"/>
+          <p:cNvSpPr/>
+          <p:nvPr/>
+        </p:nvSpPr>
+        <p:spPr>
+          <a:xfrm>
+            <a:off x="8158277" y="3204972"/>
+            <a:ext cx="1417320" cy="1417320"/>
+          </a:xfrm>
+          <a:prstGeom prst="rect">
+            <a:avLst/>
+          </a:prstGeom>
+          <a:solidFill>
+            <a:srgbClr val="F4F7FC"/>
+          </a:solidFill>
+          <a:ln w="12700">
+            <a:solidFill>
+              <a:srgbClr val="DBE6F6"/>
+            </a:solidFill>
+            <a:prstDash val="solid"/>
+          </a:ln>
+        </p:spPr>
+      </p:sp>
+      <p:sp>
+        <p:nvSpPr>
+          <p:cNvPr id="23" name="Text 17"/>
+          <p:cNvSpPr txBox="1"/>
+          <p:nvPr/>
+        </p:nvSpPr>
+        <p:spPr>
+          <a:xfrm>
+            <a:off x="8158277" y="3749040"/>
+            <a:ext cx="1417320" cy="329184"/>
+          </a:xfrm>
+          <a:prstGeom prst="rect">
+            <a:avLst/>
+          </a:prstGeom>
+          <a:noFill/>
+          <a:ln/>
+        </p:spPr>
+        <p:txBody>
+          <a:bodyPr wrap="square" rtlCol="0" anchor="ctr"/>
+          <a:lstStyle/>
+          <a:p>
+            <a:pPr algn="ctr" indent="0" marL="0">
+              <a:buNone/>
+            </a:pPr>
+            <a:r>
+              <a:rPr lang="en-US" sz="900" dirty="0">
+                <a:solidFill>
+                  <a:srgbClr val="94A3B8"/>
+                </a:solidFill>
+                <a:latin typeface="Malgun Gothic" pitchFamily="34" charset="0"/>
+                <a:ea typeface="Malgun Gothic" pitchFamily="34" charset="-122"/>
+                <a:cs typeface="Malgun Gothic" pitchFamily="34" charset="-120"/>
+              </a:rPr>
+              <a:t>사진 준비 중</a:t>
+            </a:r>
+            <a:endParaRPr lang="en-US" sz="900" dirty="0"/>
+          </a:p>
+        </p:txBody>
+      </p:sp>
+      <p:sp>
+        <p:nvSpPr>
+          <p:cNvPr id="24" name="Text 18"/>
+          <p:cNvSpPr txBox="1"/>
+          <p:nvPr/>
+        </p:nvSpPr>
+        <p:spPr>
+          <a:xfrm>
+            <a:off x="9721901" y="3204972"/>
+            <a:ext cx="2012594" cy="292608"/>
           </a:xfrm>
           <a:prstGeom prst="rect">
             <a:avLst/>
@@ -2744,7 +3050,7 @@
               <a:buNone/>
             </a:pPr>
             <a:r>
-              <a:rPr lang="en-US" sz="1500" b="1" dirty="0">
+              <a:rPr lang="en-US" sz="1300" b="1" dirty="0">
                 <a:solidFill>
                   <a:srgbClr val="0F172A"/>
                 </a:solidFill>
@@ -2752,22 +3058,22 @@
                 <a:ea typeface="Malgun Gothic" pitchFamily="34" charset="-122"/>
                 <a:cs typeface="Malgun Gothic" pitchFamily="34" charset="-120"/>
               </a:rPr>
-              <a:t>츄러스</a:t>
-            </a:r>
-            <a:endParaRPr lang="en-US" sz="1500" dirty="0"/>
-          </a:p>
-        </p:txBody>
-      </p:sp>
-      <p:sp>
-        <p:nvSpPr>
-          <p:cNvPr id="23" name="Text 15"/>
-          <p:cNvSpPr txBox="1"/>
-          <p:nvPr/>
-        </p:nvSpPr>
-        <p:spPr>
-          <a:xfrm>
-            <a:off x="5023104" y="8616696"/>
-            <a:ext cx="1972056" cy="960120"/>
+              <a:t>야끼소바</a:t>
+            </a:r>
+            <a:endParaRPr lang="en-US" sz="1300" dirty="0"/>
+          </a:p>
+        </p:txBody>
+      </p:sp>
+      <p:sp>
+        <p:nvSpPr>
+          <p:cNvPr id="25" name="Text 19"/>
+          <p:cNvSpPr txBox="1"/>
+          <p:nvPr/>
+        </p:nvSpPr>
+        <p:spPr>
+          <a:xfrm>
+            <a:off x="9721901" y="3497580"/>
+            <a:ext cx="2012594" cy="1124712"/>
           </a:xfrm>
           <a:prstGeom prst="rect">
             <a:avLst/>
@@ -2781,12 +3087,12 @@
           <a:p>
             <a:pPr algn="l" indent="0" marL="0">
               <a:lnSpc>
-                <a:spcPct val="124000"/>
+                <a:spcPct val="120000"/>
               </a:lnSpc>
               <a:buNone/>
             </a:pPr>
             <a:r>
-              <a:rPr lang="en-US" sz="950" dirty="0">
+              <a:rPr lang="en-US" sz="800" dirty="0">
                 <a:solidFill>
                   <a:srgbClr val="475569"/>
                 </a:solidFill>
@@ -2794,22 +3100,47 @@
                 <a:ea typeface="Malgun Gothic" pitchFamily="34" charset="-122"/>
                 <a:cs typeface="Malgun Gothic" pitchFamily="34" charset="-120"/>
               </a:rPr>
-              <a:t>츄러스와 아이스크림 츄러스. 아이 동반 가족 대응</a:t>
-            </a:r>
-            <a:endParaRPr lang="en-US" sz="950" dirty="0"/>
-          </a:p>
-        </p:txBody>
-      </p:sp>
-      <p:sp>
-        <p:nvSpPr>
-          <p:cNvPr id="24" name="Text 16"/>
-          <p:cNvSpPr txBox="1"/>
-          <p:nvPr/>
-        </p:nvSpPr>
-        <p:spPr>
-          <a:xfrm>
-            <a:off x="566928" y="10122408"/>
-            <a:ext cx="6428232" cy="274320"/>
+              <a:t>철판 야끼소바. 오코노미야끼와 한 부스로 묶어 운영</a:t>
+            </a:r>
+            <a:endParaRPr lang="en-US" sz="800" dirty="0"/>
+          </a:p>
+        </p:txBody>
+      </p:sp>
+      <p:sp>
+        <p:nvSpPr>
+          <p:cNvPr id="26" name="Shape 20"/>
+          <p:cNvSpPr/>
+          <p:nvPr/>
+        </p:nvSpPr>
+        <p:spPr>
+          <a:xfrm>
+            <a:off x="457200" y="4966716"/>
+            <a:ext cx="1417320" cy="1417320"/>
+          </a:xfrm>
+          <a:prstGeom prst="rect">
+            <a:avLst/>
+          </a:prstGeom>
+          <a:solidFill>
+            <a:srgbClr val="F4F7FC"/>
+          </a:solidFill>
+          <a:ln w="12700">
+            <a:solidFill>
+              <a:srgbClr val="DBE6F6"/>
+            </a:solidFill>
+            <a:prstDash val="solid"/>
+          </a:ln>
+        </p:spPr>
+      </p:sp>
+      <p:sp>
+        <p:nvSpPr>
+          <p:cNvPr id="27" name="Text 21"/>
+          <p:cNvSpPr txBox="1"/>
+          <p:nvPr/>
+        </p:nvSpPr>
+        <p:spPr>
+          <a:xfrm>
+            <a:off x="457200" y="5510784"/>
+            <a:ext cx="1417320" cy="329184"/>
           </a:xfrm>
           <a:prstGeom prst="rect">
             <a:avLst/>
@@ -2821,34 +3152,444 @@
           <a:bodyPr wrap="square" rtlCol="0" anchor="ctr"/>
           <a:lstStyle/>
           <a:p>
+            <a:pPr algn="ctr" indent="0" marL="0">
+              <a:buNone/>
+            </a:pPr>
+            <a:r>
+              <a:rPr lang="en-US" sz="900" dirty="0">
+                <a:solidFill>
+                  <a:srgbClr val="94A3B8"/>
+                </a:solidFill>
+                <a:latin typeface="Malgun Gothic" pitchFamily="34" charset="0"/>
+                <a:ea typeface="Malgun Gothic" pitchFamily="34" charset="-122"/>
+                <a:cs typeface="Malgun Gothic" pitchFamily="34" charset="-120"/>
+              </a:rPr>
+              <a:t>사진 준비 중</a:t>
+            </a:r>
+            <a:endParaRPr lang="en-US" sz="900" dirty="0"/>
+          </a:p>
+        </p:txBody>
+      </p:sp>
+      <p:sp>
+        <p:nvSpPr>
+          <p:cNvPr id="28" name="Text 22"/>
+          <p:cNvSpPr txBox="1"/>
+          <p:nvPr/>
+        </p:nvSpPr>
+        <p:spPr>
+          <a:xfrm>
+            <a:off x="2020824" y="4966716"/>
+            <a:ext cx="2012594" cy="292608"/>
+          </a:xfrm>
+          <a:prstGeom prst="rect">
+            <a:avLst/>
+          </a:prstGeom>
+          <a:noFill/>
+          <a:ln/>
+        </p:spPr>
+        <p:txBody>
+          <a:bodyPr wrap="square" rtlCol="0" anchor="t"/>
+          <a:lstStyle/>
+          <a:p>
             <a:pPr algn="l" indent="0" marL="0">
               <a:buNone/>
             </a:pPr>
             <a:r>
+              <a:rPr lang="en-US" sz="1300" b="1" dirty="0">
+                <a:solidFill>
+                  <a:srgbClr val="0F172A"/>
+                </a:solidFill>
+                <a:latin typeface="Malgun Gothic" pitchFamily="34" charset="0"/>
+                <a:ea typeface="Malgun Gothic" pitchFamily="34" charset="-122"/>
+                <a:cs typeface="Malgun Gothic" pitchFamily="34" charset="-120"/>
+              </a:rPr>
+              <a:t>회오리감자 · 소떡소떡</a:t>
+            </a:r>
+            <a:endParaRPr lang="en-US" sz="1300" dirty="0"/>
+          </a:p>
+        </p:txBody>
+      </p:sp>
+      <p:sp>
+        <p:nvSpPr>
+          <p:cNvPr id="29" name="Text 23"/>
+          <p:cNvSpPr txBox="1"/>
+          <p:nvPr/>
+        </p:nvSpPr>
+        <p:spPr>
+          <a:xfrm>
+            <a:off x="2020824" y="5259324"/>
+            <a:ext cx="2012594" cy="1124712"/>
+          </a:xfrm>
+          <a:prstGeom prst="rect">
+            <a:avLst/>
+          </a:prstGeom>
+          <a:noFill/>
+          <a:ln/>
+        </p:spPr>
+        <p:txBody>
+          <a:bodyPr wrap="square" rtlCol="0" anchor="t"/>
+          <a:lstStyle/>
+          <a:p>
+            <a:pPr algn="l" indent="0" marL="0">
+              <a:lnSpc>
+                <a:spcPct val="120000"/>
+              </a:lnSpc>
+              <a:buNone/>
+            </a:pPr>
+            <a:r>
               <a:rPr lang="en-US" sz="800" dirty="0">
                 <a:solidFill>
+                  <a:srgbClr val="475569"/>
+                </a:solidFill>
+                <a:latin typeface="Malgun Gothic" pitchFamily="34" charset="0"/>
+                <a:ea typeface="Malgun Gothic" pitchFamily="34" charset="-122"/>
+                <a:cs typeface="Malgun Gothic" pitchFamily="34" charset="-120"/>
+              </a:rPr>
+              <a:t>4,000~5,000원대. 아이 동반 가족이 가장 먼저 서는 부스</a:t>
+            </a:r>
+            <a:endParaRPr lang="en-US" sz="800" dirty="0"/>
+          </a:p>
+        </p:txBody>
+      </p:sp>
+      <p:sp>
+        <p:nvSpPr>
+          <p:cNvPr id="30" name="Shape 24"/>
+          <p:cNvSpPr/>
+          <p:nvPr/>
+        </p:nvSpPr>
+        <p:spPr>
+          <a:xfrm>
+            <a:off x="4307738" y="4966716"/>
+            <a:ext cx="1417320" cy="1417320"/>
+          </a:xfrm>
+          <a:prstGeom prst="rect">
+            <a:avLst/>
+          </a:prstGeom>
+          <a:solidFill>
+            <a:srgbClr val="F4F7FC"/>
+          </a:solidFill>
+          <a:ln w="12700">
+            <a:solidFill>
+              <a:srgbClr val="DBE6F6"/>
+            </a:solidFill>
+            <a:prstDash val="solid"/>
+          </a:ln>
+        </p:spPr>
+      </p:sp>
+      <p:sp>
+        <p:nvSpPr>
+          <p:cNvPr id="31" name="Text 25"/>
+          <p:cNvSpPr txBox="1"/>
+          <p:nvPr/>
+        </p:nvSpPr>
+        <p:spPr>
+          <a:xfrm>
+            <a:off x="4307738" y="5510784"/>
+            <a:ext cx="1417320" cy="329184"/>
+          </a:xfrm>
+          <a:prstGeom prst="rect">
+            <a:avLst/>
+          </a:prstGeom>
+          <a:noFill/>
+          <a:ln/>
+        </p:spPr>
+        <p:txBody>
+          <a:bodyPr wrap="square" rtlCol="0" anchor="ctr"/>
+          <a:lstStyle/>
+          <a:p>
+            <a:pPr algn="ctr" indent="0" marL="0">
+              <a:buNone/>
+            </a:pPr>
+            <a:r>
+              <a:rPr lang="en-US" sz="900" dirty="0">
+                <a:solidFill>
                   <a:srgbClr val="94A3B8"/>
                 </a:solidFill>
                 <a:latin typeface="Malgun Gothic" pitchFamily="34" charset="0"/>
                 <a:ea typeface="Malgun Gothic" pitchFamily="34" charset="-122"/>
                 <a:cs typeface="Malgun Gothic" pitchFamily="34" charset="-120"/>
               </a:rPr>
+              <a:t>사진 준비 중</a:t>
+            </a:r>
+            <a:endParaRPr lang="en-US" sz="900" dirty="0"/>
+          </a:p>
+        </p:txBody>
+      </p:sp>
+      <p:sp>
+        <p:nvSpPr>
+          <p:cNvPr id="32" name="Text 26"/>
+          <p:cNvSpPr txBox="1"/>
+          <p:nvPr/>
+        </p:nvSpPr>
+        <p:spPr>
+          <a:xfrm>
+            <a:off x="5871362" y="4966716"/>
+            <a:ext cx="2012594" cy="292608"/>
+          </a:xfrm>
+          <a:prstGeom prst="rect">
+            <a:avLst/>
+          </a:prstGeom>
+          <a:noFill/>
+          <a:ln/>
+        </p:spPr>
+        <p:txBody>
+          <a:bodyPr wrap="square" rtlCol="0" anchor="t"/>
+          <a:lstStyle/>
+          <a:p>
+            <a:pPr algn="l" indent="0" marL="0">
+              <a:buNone/>
+            </a:pPr>
+            <a:r>
+              <a:rPr lang="en-US" sz="1300" b="1" dirty="0">
+                <a:solidFill>
+                  <a:srgbClr val="0F172A"/>
+                </a:solidFill>
+                <a:latin typeface="Malgun Gothic" pitchFamily="34" charset="0"/>
+                <a:ea typeface="Malgun Gothic" pitchFamily="34" charset="-122"/>
+                <a:cs typeface="Malgun Gothic" pitchFamily="34" charset="-120"/>
+              </a:rPr>
+              <a:t>핫도그</a:t>
+            </a:r>
+            <a:endParaRPr lang="en-US" sz="1300" dirty="0"/>
+          </a:p>
+        </p:txBody>
+      </p:sp>
+      <p:sp>
+        <p:nvSpPr>
+          <p:cNvPr id="33" name="Text 27"/>
+          <p:cNvSpPr txBox="1"/>
+          <p:nvPr/>
+        </p:nvSpPr>
+        <p:spPr>
+          <a:xfrm>
+            <a:off x="5871362" y="5259324"/>
+            <a:ext cx="2012594" cy="1124712"/>
+          </a:xfrm>
+          <a:prstGeom prst="rect">
+            <a:avLst/>
+          </a:prstGeom>
+          <a:noFill/>
+          <a:ln/>
+        </p:spPr>
+        <p:txBody>
+          <a:bodyPr wrap="square" rtlCol="0" anchor="t"/>
+          <a:lstStyle/>
+          <a:p>
+            <a:pPr algn="l" indent="0" marL="0">
+              <a:lnSpc>
+                <a:spcPct val="120000"/>
+              </a:lnSpc>
+              <a:buNone/>
+            </a:pPr>
+            <a:r>
+              <a:rPr lang="en-US" sz="800" dirty="0">
+                <a:solidFill>
+                  <a:srgbClr val="475569"/>
+                </a:solidFill>
+                <a:latin typeface="Malgun Gothic" pitchFamily="34" charset="0"/>
+                <a:ea typeface="Malgun Gothic" pitchFamily="34" charset="-122"/>
+                <a:cs typeface="Malgun Gothic" pitchFamily="34" charset="-120"/>
+              </a:rPr>
+              <a:t>뉴욕핫도그·옛날핫도그. 한 손 취식형 저단가 메뉴</a:t>
+            </a:r>
+            <a:endParaRPr lang="en-US" sz="800" dirty="0"/>
+          </a:p>
+        </p:txBody>
+      </p:sp>
+      <p:sp>
+        <p:nvSpPr>
+          <p:cNvPr id="34" name="Shape 28"/>
+          <p:cNvSpPr/>
+          <p:nvPr/>
+        </p:nvSpPr>
+        <p:spPr>
+          <a:xfrm>
+            <a:off x="8158277" y="4966716"/>
+            <a:ext cx="1417320" cy="1417320"/>
+          </a:xfrm>
+          <a:prstGeom prst="rect">
+            <a:avLst/>
+          </a:prstGeom>
+          <a:solidFill>
+            <a:srgbClr val="F4F7FC"/>
+          </a:solidFill>
+          <a:ln w="12700">
+            <a:solidFill>
+              <a:srgbClr val="DBE6F6"/>
+            </a:solidFill>
+            <a:prstDash val="solid"/>
+          </a:ln>
+        </p:spPr>
+      </p:sp>
+      <p:sp>
+        <p:nvSpPr>
+          <p:cNvPr id="35" name="Text 29"/>
+          <p:cNvSpPr txBox="1"/>
+          <p:nvPr/>
+        </p:nvSpPr>
+        <p:spPr>
+          <a:xfrm>
+            <a:off x="8158277" y="5510784"/>
+            <a:ext cx="1417320" cy="329184"/>
+          </a:xfrm>
+          <a:prstGeom prst="rect">
+            <a:avLst/>
+          </a:prstGeom>
+          <a:noFill/>
+          <a:ln/>
+        </p:spPr>
+        <p:txBody>
+          <a:bodyPr wrap="square" rtlCol="0" anchor="ctr"/>
+          <a:lstStyle/>
+          <a:p>
+            <a:pPr algn="ctr" indent="0" marL="0">
+              <a:buNone/>
+            </a:pPr>
+            <a:r>
+              <a:rPr lang="en-US" sz="900" dirty="0">
+                <a:solidFill>
+                  <a:srgbClr val="94A3B8"/>
+                </a:solidFill>
+                <a:latin typeface="Malgun Gothic" pitchFamily="34" charset="0"/>
+                <a:ea typeface="Malgun Gothic" pitchFamily="34" charset="-122"/>
+                <a:cs typeface="Malgun Gothic" pitchFamily="34" charset="-120"/>
+              </a:rPr>
+              <a:t>사진 준비 중</a:t>
+            </a:r>
+            <a:endParaRPr lang="en-US" sz="900" dirty="0"/>
+          </a:p>
+        </p:txBody>
+      </p:sp>
+      <p:sp>
+        <p:nvSpPr>
+          <p:cNvPr id="36" name="Text 30"/>
+          <p:cNvSpPr txBox="1"/>
+          <p:nvPr/>
+        </p:nvSpPr>
+        <p:spPr>
+          <a:xfrm>
+            <a:off x="9721901" y="4966716"/>
+            <a:ext cx="2012594" cy="292608"/>
+          </a:xfrm>
+          <a:prstGeom prst="rect">
+            <a:avLst/>
+          </a:prstGeom>
+          <a:noFill/>
+          <a:ln/>
+        </p:spPr>
+        <p:txBody>
+          <a:bodyPr wrap="square" rtlCol="0" anchor="t"/>
+          <a:lstStyle/>
+          <a:p>
+            <a:pPr algn="l" indent="0" marL="0">
+              <a:buNone/>
+            </a:pPr>
+            <a:r>
+              <a:rPr lang="en-US" sz="1300" b="1" dirty="0">
+                <a:solidFill>
+                  <a:srgbClr val="0F172A"/>
+                </a:solidFill>
+                <a:latin typeface="Malgun Gothic" pitchFamily="34" charset="0"/>
+                <a:ea typeface="Malgun Gothic" pitchFamily="34" charset="-122"/>
+                <a:cs typeface="Malgun Gothic" pitchFamily="34" charset="-120"/>
+              </a:rPr>
+              <a:t>새우꼬치 · 부산어묵</a:t>
+            </a:r>
+            <a:endParaRPr lang="en-US" sz="1300" dirty="0"/>
+          </a:p>
+        </p:txBody>
+      </p:sp>
+      <p:sp>
+        <p:nvSpPr>
+          <p:cNvPr id="37" name="Text 31"/>
+          <p:cNvSpPr txBox="1"/>
+          <p:nvPr/>
+        </p:nvSpPr>
+        <p:spPr>
+          <a:xfrm>
+            <a:off x="9721901" y="5259324"/>
+            <a:ext cx="2012594" cy="1124712"/>
+          </a:xfrm>
+          <a:prstGeom prst="rect">
+            <a:avLst/>
+          </a:prstGeom>
+          <a:noFill/>
+          <a:ln/>
+        </p:spPr>
+        <p:txBody>
+          <a:bodyPr wrap="square" rtlCol="0" anchor="t"/>
+          <a:lstStyle/>
+          <a:p>
+            <a:pPr algn="l" indent="0" marL="0">
+              <a:lnSpc>
+                <a:spcPct val="120000"/>
+              </a:lnSpc>
+              <a:buNone/>
+            </a:pPr>
+            <a:r>
+              <a:rPr lang="en-US" sz="800" dirty="0">
+                <a:solidFill>
+                  <a:srgbClr val="475569"/>
+                </a:solidFill>
+                <a:latin typeface="Malgun Gothic" pitchFamily="34" charset="0"/>
+                <a:ea typeface="Malgun Gothic" pitchFamily="34" charset="-122"/>
+                <a:cs typeface="Malgun Gothic" pitchFamily="34" charset="-120"/>
+              </a:rPr>
+              <a:t>레몬새우·칠리새우와 어묵 3꼬치 4,000원 구성</a:t>
+            </a:r>
+            <a:endParaRPr lang="en-US" sz="800" dirty="0"/>
+          </a:p>
+        </p:txBody>
+      </p:sp>
+      <p:sp>
+        <p:nvSpPr>
+          <p:cNvPr id="38" name="Text 32"/>
+          <p:cNvSpPr txBox="1"/>
+          <p:nvPr/>
+        </p:nvSpPr>
+        <p:spPr>
+          <a:xfrm>
+            <a:off x="457200" y="6492240"/>
+            <a:ext cx="10637215" cy="274320"/>
+          </a:xfrm>
+          <a:prstGeom prst="rect">
+            <a:avLst/>
+          </a:prstGeom>
+          <a:noFill/>
+          <a:ln/>
+        </p:spPr>
+        <p:txBody>
+          <a:bodyPr wrap="square" rtlCol="0" anchor="t"/>
+          <a:lstStyle/>
+          <a:p>
+            <a:pPr algn="l" indent="0" marL="0">
+              <a:buNone/>
+            </a:pPr>
+            <a:r>
+              <a:rPr lang="en-US" sz="750" dirty="0">
+                <a:solidFill>
+                  <a:srgbClr val="94A3B8"/>
+                </a:solidFill>
+                <a:latin typeface="Malgun Gothic" pitchFamily="34" charset="0"/>
+                <a:ea typeface="Malgun Gothic" pitchFamily="34" charset="-122"/>
+                <a:cs typeface="Malgun Gothic" pitchFamily="34" charset="-120"/>
+              </a:rPr>
               <a:t>플릿 유니온 · www.flitunion.com</a:t>
             </a:r>
-            <a:endParaRPr lang="en-US" sz="800" dirty="0"/>
-          </a:p>
-        </p:txBody>
-      </p:sp>
-      <p:sp>
-        <p:nvSpPr>
-          <p:cNvPr id="25" name="Text 17"/>
-          <p:cNvSpPr txBox="1"/>
-          <p:nvPr/>
-        </p:nvSpPr>
-        <p:spPr>
-          <a:xfrm>
-            <a:off x="566928" y="10122408"/>
-            <a:ext cx="6428232" cy="274320"/>
+            <a:endParaRPr lang="en-US" sz="750" dirty="0"/>
+          </a:p>
+        </p:txBody>
+      </p:sp>
+      <p:sp>
+        <p:nvSpPr>
+          <p:cNvPr id="39" name="Text 33"/>
+          <p:cNvSpPr txBox="1"/>
+          <p:nvPr/>
+        </p:nvSpPr>
+        <p:spPr>
+          <a:xfrm>
+            <a:off x="457200" y="6492240"/>
+            <a:ext cx="11277295" cy="274320"/>
           </a:xfrm>
           <a:prstGeom prst="rect">
             <a:avLst/>
@@ -2864,7 +3605,7 @@
               <a:buNone/>
             </a:pPr>
             <a:r>
-              <a:rPr lang="en-US" sz="800" dirty="0">
+              <a:rPr lang="en-US" sz="750" dirty="0">
                 <a:solidFill>
                   <a:srgbClr val="94A3B8"/>
                 </a:solidFill>
@@ -2872,9 +3613,9 @@
                 <a:ea typeface="Malgun Gothic" pitchFamily="34" charset="-122"/>
                 <a:cs typeface="Malgun Gothic" pitchFamily="34" charset="-120"/>
               </a:rPr>
-              <a:t>2 / 4</a:t>
-            </a:r>
-            <a:endParaRPr lang="en-US" sz="800" dirty="0"/>
+              <a:t>2 / 3</a:t>
+            </a:r>
+            <a:endParaRPr lang="en-US" sz="750" dirty="0"/>
           </a:p>
         </p:txBody>
       </p:sp>
@@ -2918,8 +3659,8 @@
         </p:nvSpPr>
         <p:spPr>
           <a:xfrm>
-            <a:off x="0" y="566928"/>
-            <a:ext cx="7562088" cy="566928"/>
+            <a:off x="0" y="201168"/>
+            <a:ext cx="12191695" cy="274320"/>
           </a:xfrm>
           <a:prstGeom prst="rect">
             <a:avLst/>
@@ -2935,7 +3676,7 @@
               <a:buNone/>
             </a:pPr>
             <a:r>
-              <a:rPr lang="en-US" sz="3400" b="1" spc="100" kern="0" dirty="0">
+              <a:rPr lang="en-US" sz="1600" b="1" spc="100" kern="0" dirty="0">
                 <a:solidFill>
                   <a:srgbClr val="3182F6"/>
                 </a:solidFill>
@@ -2945,7 +3686,7 @@
               </a:rPr>
               <a:t>플릿 유니온</a:t>
             </a:r>
-            <a:endParaRPr lang="en-US" sz="3400" dirty="0"/>
+            <a:endParaRPr lang="en-US" sz="1600" dirty="0"/>
           </a:p>
         </p:txBody>
       </p:sp>
@@ -2957,8 +3698,8 @@
         </p:nvSpPr>
         <p:spPr>
           <a:xfrm>
-            <a:off x="0" y="1078992"/>
-            <a:ext cx="7562088" cy="713232"/>
+            <a:off x="0" y="457200"/>
+            <a:ext cx="12191695" cy="457200"/>
           </a:xfrm>
           <a:prstGeom prst="rect">
             <a:avLst/>
@@ -2974,7 +3715,7 @@
               <a:buNone/>
             </a:pPr>
             <a:r>
-              <a:rPr lang="en-US" sz="4400" b="1" dirty="0">
+              <a:rPr lang="en-US" sz="2800" b="1" dirty="0">
                 <a:solidFill>
                   <a:srgbClr val="0B1F44"/>
                 </a:solidFill>
@@ -2984,7 +3725,7 @@
               </a:rPr>
               <a:t>푸드트럭 메뉴</a:t>
             </a:r>
-            <a:endParaRPr lang="en-US" sz="4400" dirty="0"/>
+            <a:endParaRPr lang="en-US" sz="2800" dirty="0"/>
           </a:p>
         </p:txBody>
       </p:sp>
@@ -2996,8 +3737,8 @@
         </p:nvSpPr>
         <p:spPr>
           <a:xfrm>
-            <a:off x="1220724" y="1847088"/>
-            <a:ext cx="5120640" cy="402336"/>
+            <a:off x="3809848" y="932688"/>
+            <a:ext cx="4572000" cy="310896"/>
           </a:xfrm>
           <a:prstGeom prst="roundRect">
             <a:avLst>
@@ -3023,8 +3764,8 @@
         </p:nvSpPr>
         <p:spPr>
           <a:xfrm>
-            <a:off x="1220724" y="1847088"/>
-            <a:ext cx="5120640" cy="402336"/>
+            <a:off x="3809848" y="932688"/>
+            <a:ext cx="4572000" cy="310896"/>
           </a:xfrm>
           <a:prstGeom prst="rect">
             <a:avLst/>
@@ -3040,7 +3781,7 @@
               <a:buNone/>
             </a:pPr>
             <a:r>
-              <a:rPr lang="en-US" sz="1300" b="1" dirty="0">
+              <a:rPr lang="en-US" sz="1100" b="1" dirty="0">
                 <a:solidFill>
                   <a:srgbClr val="0B1F44"/>
                 </a:solidFill>
@@ -3048,127 +3789,22 @@
                 <a:ea typeface="Malgun Gothic" pitchFamily="34" charset="-122"/>
                 <a:cs typeface="Malgun Gothic" pitchFamily="34" charset="-120"/>
               </a:rPr>
-              <a:t>· 음료 · 간식 ·</a:t>
-            </a:r>
-            <a:endParaRPr lang="en-US" sz="1300" dirty="0"/>
-          </a:p>
-        </p:txBody>
-      </p:sp>
-      <p:pic>
-        <p:nvPicPr>
-          <p:cNvPr id="6" name="Image 0" descr="/tmp/claude-0/-home-user/0916ad07-ee04-5cb5-987c-27fb9c83eb46/scratchpad/catalog/ft/chan-cafe.jpg">    </p:cNvPr>
-          <p:cNvPicPr>
-            <a:picLocks noChangeAspect="1"/>
-          </p:cNvPicPr>
-          <p:nvPr/>
-        </p:nvPicPr>
-        <p:blipFill>
-          <a:blip r:embed="rId1"/>
-          <a:stretch>
-            <a:fillRect/>
-          </a:stretch>
-        </p:blipFill>
-        <p:spPr>
-          <a:xfrm>
-            <a:off x="566928" y="2395728"/>
-            <a:ext cx="1972056" cy="1972056"/>
-          </a:xfrm>
-          <a:prstGeom prst="rect">
-            <a:avLst/>
-          </a:prstGeom>
-        </p:spPr>
-      </p:pic>
-      <p:sp>
-        <p:nvSpPr>
-          <p:cNvPr id="7" name="Text 4"/>
-          <p:cNvSpPr txBox="1"/>
-          <p:nvPr/>
-        </p:nvSpPr>
-        <p:spPr>
-          <a:xfrm>
-            <a:off x="566928" y="4477512"/>
-            <a:ext cx="1972056" cy="384048"/>
-          </a:xfrm>
-          <a:prstGeom prst="rect">
-            <a:avLst/>
-          </a:prstGeom>
-          <a:noFill/>
-          <a:ln/>
-        </p:spPr>
-        <p:txBody>
-          <a:bodyPr wrap="square" rtlCol="0" anchor="t"/>
-          <a:lstStyle/>
-          <a:p>
-            <a:pPr algn="l" indent="0" marL="0">
-              <a:buNone/>
-            </a:pPr>
-            <a:r>
-              <a:rPr lang="en-US" sz="1500" b="1" dirty="0">
-                <a:solidFill>
-                  <a:srgbClr val="0F172A"/>
-                </a:solidFill>
-                <a:latin typeface="Malgun Gothic" pitchFamily="34" charset="0"/>
-                <a:ea typeface="Malgun Gothic" pitchFamily="34" charset="-122"/>
-                <a:cs typeface="Malgun Gothic" pitchFamily="34" charset="-120"/>
-              </a:rPr>
-              <a:t>커피 · 에이드</a:t>
-            </a:r>
-            <a:endParaRPr lang="en-US" sz="1500" dirty="0"/>
-          </a:p>
-        </p:txBody>
-      </p:sp>
-      <p:sp>
-        <p:nvSpPr>
-          <p:cNvPr id="8" name="Text 5"/>
-          <p:cNvSpPr txBox="1"/>
-          <p:nvPr/>
-        </p:nvSpPr>
-        <p:spPr>
-          <a:xfrm>
-            <a:off x="566928" y="4861560"/>
-            <a:ext cx="1972056" cy="960120"/>
-          </a:xfrm>
-          <a:prstGeom prst="rect">
-            <a:avLst/>
-          </a:prstGeom>
-          <a:noFill/>
-          <a:ln/>
-        </p:spPr>
-        <p:txBody>
-          <a:bodyPr wrap="square" rtlCol="0" anchor="t"/>
-          <a:lstStyle/>
-          <a:p>
-            <a:pPr algn="l" indent="0" marL="0">
-              <a:lnSpc>
-                <a:spcPct val="124000"/>
-              </a:lnSpc>
-              <a:buNone/>
-            </a:pPr>
-            <a:r>
-              <a:rPr lang="en-US" sz="950" dirty="0">
-                <a:solidFill>
-                  <a:srgbClr val="475569"/>
-                </a:solidFill>
-                <a:latin typeface="Malgun Gothic" pitchFamily="34" charset="0"/>
-                <a:ea typeface="Malgun Gothic" pitchFamily="34" charset="-122"/>
-                <a:cs typeface="Malgun Gothic" pitchFamily="34" charset="-120"/>
-              </a:rPr>
-              <a:t>아메리카노·에이드·스무디. 체류 시간을 늘리는 필수 구성</a:t>
-            </a:r>
-            <a:endParaRPr lang="en-US" sz="950" dirty="0"/>
-          </a:p>
-        </p:txBody>
-      </p:sp>
-      <p:sp>
-        <p:nvSpPr>
-          <p:cNvPr id="9" name="Shape 6"/>
+              <a:t>· 간식 · 음료 확장 ·</a:t>
+            </a:r>
+            <a:endParaRPr lang="en-US" sz="1100" dirty="0"/>
+          </a:p>
+        </p:txBody>
+      </p:sp>
+      <p:sp>
+        <p:nvSpPr>
+          <p:cNvPr id="6" name="Shape 4"/>
           <p:cNvSpPr/>
           <p:nvPr/>
         </p:nvSpPr>
         <p:spPr>
           <a:xfrm>
-            <a:off x="2795016" y="2395728"/>
-            <a:ext cx="1972056" cy="1972056"/>
+            <a:off x="457200" y="1443228"/>
+            <a:ext cx="1417320" cy="1417320"/>
           </a:xfrm>
           <a:prstGeom prst="rect">
             <a:avLst/>
@@ -3186,14 +3822,14 @@
       </p:sp>
       <p:sp>
         <p:nvSpPr>
-          <p:cNvPr id="10" name="Text 7"/>
-          <p:cNvSpPr txBox="1"/>
-          <p:nvPr/>
-        </p:nvSpPr>
-        <p:spPr>
-          <a:xfrm>
-            <a:off x="2795016" y="3198876"/>
-            <a:ext cx="1972056" cy="365760"/>
+          <p:cNvPr id="7" name="Text 5"/>
+          <p:cNvSpPr txBox="1"/>
+          <p:nvPr/>
+        </p:nvSpPr>
+        <p:spPr>
+          <a:xfrm>
+            <a:off x="457200" y="1987296"/>
+            <a:ext cx="1417320" cy="329184"/>
           </a:xfrm>
           <a:prstGeom prst="rect">
             <a:avLst/>
@@ -3209,7 +3845,7 @@
               <a:buNone/>
             </a:pPr>
             <a:r>
-              <a:rPr lang="en-US" sz="1100" dirty="0">
+              <a:rPr lang="en-US" sz="900" dirty="0">
                 <a:solidFill>
                   <a:srgbClr val="94A3B8"/>
                 </a:solidFill>
@@ -3219,20 +3855,20 @@
               </a:rPr>
               <a:t>사진 준비 중</a:t>
             </a:r>
-            <a:endParaRPr lang="en-US" sz="1100" dirty="0"/>
-          </a:p>
-        </p:txBody>
-      </p:sp>
-      <p:sp>
-        <p:nvSpPr>
-          <p:cNvPr id="11" name="Text 8"/>
-          <p:cNvSpPr txBox="1"/>
-          <p:nvPr/>
-        </p:nvSpPr>
-        <p:spPr>
-          <a:xfrm>
-            <a:off x="2795016" y="4477512"/>
-            <a:ext cx="1972056" cy="384048"/>
+            <a:endParaRPr lang="en-US" sz="900" dirty="0"/>
+          </a:p>
+        </p:txBody>
+      </p:sp>
+      <p:sp>
+        <p:nvSpPr>
+          <p:cNvPr id="8" name="Text 6"/>
+          <p:cNvSpPr txBox="1"/>
+          <p:nvPr/>
+        </p:nvSpPr>
+        <p:spPr>
+          <a:xfrm>
+            <a:off x="2020824" y="1443228"/>
+            <a:ext cx="2012594" cy="292608"/>
           </a:xfrm>
           <a:prstGeom prst="rect">
             <a:avLst/>
@@ -3248,7 +3884,7 @@
               <a:buNone/>
             </a:pPr>
             <a:r>
-              <a:rPr lang="en-US" sz="1500" b="1" dirty="0">
+              <a:rPr lang="en-US" sz="1300" b="1" dirty="0">
                 <a:solidFill>
                   <a:srgbClr val="0F172A"/>
                 </a:solidFill>
@@ -3256,22 +3892,22 @@
                 <a:ea typeface="Malgun Gothic" pitchFamily="34" charset="-122"/>
                 <a:cs typeface="Malgun Gothic" pitchFamily="34" charset="-120"/>
               </a:rPr>
-              <a:t>우동</a:t>
-            </a:r>
-            <a:endParaRPr lang="en-US" sz="1500" dirty="0"/>
-          </a:p>
-        </p:txBody>
-      </p:sp>
-      <p:sp>
-        <p:nvSpPr>
-          <p:cNvPr id="12" name="Text 9"/>
-          <p:cNvSpPr txBox="1"/>
-          <p:nvPr/>
-        </p:nvSpPr>
-        <p:spPr>
-          <a:xfrm>
-            <a:off x="2795016" y="4861560"/>
-            <a:ext cx="1972056" cy="960120"/>
+              <a:t>새우튀김 · 새우버거</a:t>
+            </a:r>
+            <a:endParaRPr lang="en-US" sz="1300" dirty="0"/>
+          </a:p>
+        </p:txBody>
+      </p:sp>
+      <p:sp>
+        <p:nvSpPr>
+          <p:cNvPr id="9" name="Text 7"/>
+          <p:cNvSpPr txBox="1"/>
+          <p:nvPr/>
+        </p:nvSpPr>
+        <p:spPr>
+          <a:xfrm>
+            <a:off x="2020824" y="1735836"/>
+            <a:ext cx="2012594" cy="1124712"/>
           </a:xfrm>
           <a:prstGeom prst="rect">
             <a:avLst/>
@@ -3285,12 +3921,12 @@
           <a:p>
             <a:pPr algn="l" indent="0" marL="0">
               <a:lnSpc>
-                <a:spcPct val="124000"/>
+                <a:spcPct val="120000"/>
               </a:lnSpc>
               <a:buNone/>
             </a:pPr>
             <a:r>
-              <a:rPr lang="en-US" sz="950" dirty="0">
+              <a:rPr lang="en-US" sz="800" dirty="0">
                 <a:solidFill>
                   <a:srgbClr val="475569"/>
                 </a:solidFill>
@@ -3298,22 +3934,22 @@
                 <a:ea typeface="Malgun Gothic" pitchFamily="34" charset="-122"/>
                 <a:cs typeface="Malgun Gothic" pitchFamily="34" charset="-120"/>
               </a:rPr>
-              <a:t>기본 우동·김치우동·튀김우동. 저녁 시간대와 추운 계절에 강함</a:t>
-            </a:r>
-            <a:endParaRPr lang="en-US" sz="950" dirty="0"/>
-          </a:p>
-        </p:txBody>
-      </p:sp>
-      <p:sp>
-        <p:nvSpPr>
-          <p:cNvPr id="13" name="Shape 10"/>
+              <a:t>튀김류 중심 구성. 감자튀김 사이드 운영</a:t>
+            </a:r>
+            <a:endParaRPr lang="en-US" sz="800" dirty="0"/>
+          </a:p>
+        </p:txBody>
+      </p:sp>
+      <p:sp>
+        <p:nvSpPr>
+          <p:cNvPr id="10" name="Shape 8"/>
           <p:cNvSpPr/>
           <p:nvPr/>
         </p:nvSpPr>
         <p:spPr>
           <a:xfrm>
-            <a:off x="5023104" y="2395728"/>
-            <a:ext cx="1972056" cy="1972056"/>
+            <a:off x="4307738" y="1443228"/>
+            <a:ext cx="1417320" cy="1417320"/>
           </a:xfrm>
           <a:prstGeom prst="rect">
             <a:avLst/>
@@ -3331,14 +3967,14 @@
       </p:sp>
       <p:sp>
         <p:nvSpPr>
-          <p:cNvPr id="14" name="Text 11"/>
-          <p:cNvSpPr txBox="1"/>
-          <p:nvPr/>
-        </p:nvSpPr>
-        <p:spPr>
-          <a:xfrm>
-            <a:off x="5023104" y="3198876"/>
-            <a:ext cx="1972056" cy="365760"/>
+          <p:cNvPr id="11" name="Text 9"/>
+          <p:cNvSpPr txBox="1"/>
+          <p:nvPr/>
+        </p:nvSpPr>
+        <p:spPr>
+          <a:xfrm>
+            <a:off x="4307738" y="1987296"/>
+            <a:ext cx="1417320" cy="329184"/>
           </a:xfrm>
           <a:prstGeom prst="rect">
             <a:avLst/>
@@ -3354,7 +3990,7 @@
               <a:buNone/>
             </a:pPr>
             <a:r>
-              <a:rPr lang="en-US" sz="1100" dirty="0">
+              <a:rPr lang="en-US" sz="900" dirty="0">
                 <a:solidFill>
                   <a:srgbClr val="94A3B8"/>
                 </a:solidFill>
@@ -3364,20 +4000,20 @@
               </a:rPr>
               <a:t>사진 준비 중</a:t>
             </a:r>
-            <a:endParaRPr lang="en-US" sz="1100" dirty="0"/>
-          </a:p>
-        </p:txBody>
-      </p:sp>
-      <p:sp>
-        <p:nvSpPr>
-          <p:cNvPr id="15" name="Text 12"/>
-          <p:cNvSpPr txBox="1"/>
-          <p:nvPr/>
-        </p:nvSpPr>
-        <p:spPr>
-          <a:xfrm>
-            <a:off x="5023104" y="4477512"/>
-            <a:ext cx="1972056" cy="384048"/>
+            <a:endParaRPr lang="en-US" sz="900" dirty="0"/>
+          </a:p>
+        </p:txBody>
+      </p:sp>
+      <p:sp>
+        <p:nvSpPr>
+          <p:cNvPr id="12" name="Text 10"/>
+          <p:cNvSpPr txBox="1"/>
+          <p:nvPr/>
+        </p:nvSpPr>
+        <p:spPr>
+          <a:xfrm>
+            <a:off x="5871362" y="1443228"/>
+            <a:ext cx="2012594" cy="292608"/>
           </a:xfrm>
           <a:prstGeom prst="rect">
             <a:avLst/>
@@ -3393,7 +4029,7 @@
               <a:buNone/>
             </a:pPr>
             <a:r>
-              <a:rPr lang="en-US" sz="1500" b="1" dirty="0">
+              <a:rPr lang="en-US" sz="1300" b="1" dirty="0">
                 <a:solidFill>
                   <a:srgbClr val="0F172A"/>
                 </a:solidFill>
@@ -3401,22 +4037,22 @@
                 <a:ea typeface="Malgun Gothic" pitchFamily="34" charset="-122"/>
                 <a:cs typeface="Malgun Gothic" pitchFamily="34" charset="-120"/>
               </a:rPr>
-              <a:t>야끼소바</a:t>
-            </a:r>
-            <a:endParaRPr lang="en-US" sz="1500" dirty="0"/>
-          </a:p>
-        </p:txBody>
-      </p:sp>
-      <p:sp>
-        <p:nvSpPr>
-          <p:cNvPr id="16" name="Text 13"/>
-          <p:cNvSpPr txBox="1"/>
-          <p:nvPr/>
-        </p:nvSpPr>
-        <p:spPr>
-          <a:xfrm>
-            <a:off x="5023104" y="4861560"/>
-            <a:ext cx="1972056" cy="960120"/>
+              <a:t>충무김밥</a:t>
+            </a:r>
+            <a:endParaRPr lang="en-US" sz="1300" dirty="0"/>
+          </a:p>
+        </p:txBody>
+      </p:sp>
+      <p:sp>
+        <p:nvSpPr>
+          <p:cNvPr id="13" name="Text 11"/>
+          <p:cNvSpPr txBox="1"/>
+          <p:nvPr/>
+        </p:nvSpPr>
+        <p:spPr>
+          <a:xfrm>
+            <a:off x="5871362" y="1735836"/>
+            <a:ext cx="2012594" cy="1124712"/>
           </a:xfrm>
           <a:prstGeom prst="rect">
             <a:avLst/>
@@ -3430,12 +4066,12 @@
           <a:p>
             <a:pPr algn="l" indent="0" marL="0">
               <a:lnSpc>
-                <a:spcPct val="124000"/>
+                <a:spcPct val="120000"/>
               </a:lnSpc>
               <a:buNone/>
             </a:pPr>
             <a:r>
-              <a:rPr lang="en-US" sz="950" dirty="0">
+              <a:rPr lang="en-US" sz="800" dirty="0">
                 <a:solidFill>
                   <a:srgbClr val="475569"/>
                 </a:solidFill>
@@ -3443,22 +4079,22 @@
                 <a:ea typeface="Malgun Gothic" pitchFamily="34" charset="-122"/>
                 <a:cs typeface="Malgun Gothic" pitchFamily="34" charset="-120"/>
               </a:rPr>
-              <a:t>철판 야끼소바. 오코노미야끼와 한 부스로 묶어 운영</a:t>
-            </a:r>
-            <a:endParaRPr lang="en-US" sz="950" dirty="0"/>
-          </a:p>
-        </p:txBody>
-      </p:sp>
-      <p:sp>
-        <p:nvSpPr>
-          <p:cNvPr id="17" name="Shape 14"/>
+              <a:t>포장 도시락형. 앉을 자리가 있는 행사에 적합</a:t>
+            </a:r>
+            <a:endParaRPr lang="en-US" sz="800" dirty="0"/>
+          </a:p>
+        </p:txBody>
+      </p:sp>
+      <p:sp>
+        <p:nvSpPr>
+          <p:cNvPr id="14" name="Shape 12"/>
           <p:cNvSpPr/>
           <p:nvPr/>
         </p:nvSpPr>
         <p:spPr>
           <a:xfrm>
-            <a:off x="566928" y="6150864"/>
-            <a:ext cx="1972056" cy="1972056"/>
+            <a:off x="8158277" y="1443228"/>
+            <a:ext cx="1417320" cy="1417320"/>
           </a:xfrm>
           <a:prstGeom prst="rect">
             <a:avLst/>
@@ -3476,14 +4112,14 @@
       </p:sp>
       <p:sp>
         <p:nvSpPr>
-          <p:cNvPr id="18" name="Text 15"/>
-          <p:cNvSpPr txBox="1"/>
-          <p:nvPr/>
-        </p:nvSpPr>
-        <p:spPr>
-          <a:xfrm>
-            <a:off x="566928" y="6954012"/>
-            <a:ext cx="1972056" cy="365760"/>
+          <p:cNvPr id="15" name="Text 13"/>
+          <p:cNvSpPr txBox="1"/>
+          <p:nvPr/>
+        </p:nvSpPr>
+        <p:spPr>
+          <a:xfrm>
+            <a:off x="8158277" y="1987296"/>
+            <a:ext cx="1417320" cy="329184"/>
           </a:xfrm>
           <a:prstGeom prst="rect">
             <a:avLst/>
@@ -3499,7 +4135,7 @@
               <a:buNone/>
             </a:pPr>
             <a:r>
-              <a:rPr lang="en-US" sz="1100" dirty="0">
+              <a:rPr lang="en-US" sz="900" dirty="0">
                 <a:solidFill>
                   <a:srgbClr val="94A3B8"/>
                 </a:solidFill>
@@ -3509,20 +4145,20 @@
               </a:rPr>
               <a:t>사진 준비 중</a:t>
             </a:r>
-            <a:endParaRPr lang="en-US" sz="1100" dirty="0"/>
-          </a:p>
-        </p:txBody>
-      </p:sp>
-      <p:sp>
-        <p:nvSpPr>
-          <p:cNvPr id="19" name="Text 16"/>
-          <p:cNvSpPr txBox="1"/>
-          <p:nvPr/>
-        </p:nvSpPr>
-        <p:spPr>
-          <a:xfrm>
-            <a:off x="566928" y="8232648"/>
-            <a:ext cx="1972056" cy="384048"/>
+            <a:endParaRPr lang="en-US" sz="900" dirty="0"/>
+          </a:p>
+        </p:txBody>
+      </p:sp>
+      <p:sp>
+        <p:nvSpPr>
+          <p:cNvPr id="16" name="Text 14"/>
+          <p:cNvSpPr txBox="1"/>
+          <p:nvPr/>
+        </p:nvSpPr>
+        <p:spPr>
+          <a:xfrm>
+            <a:off x="9721901" y="1443228"/>
+            <a:ext cx="2012594" cy="292608"/>
           </a:xfrm>
           <a:prstGeom prst="rect">
             <a:avLst/>
@@ -3538,7 +4174,7 @@
               <a:buNone/>
             </a:pPr>
             <a:r>
-              <a:rPr lang="en-US" sz="1500" b="1" dirty="0">
+              <a:rPr lang="en-US" sz="1300" b="1" dirty="0">
                 <a:solidFill>
                   <a:srgbClr val="0F172A"/>
                 </a:solidFill>
@@ -3546,22 +4182,22 @@
                 <a:ea typeface="Malgun Gothic" pitchFamily="34" charset="-122"/>
                 <a:cs typeface="Malgun Gothic" pitchFamily="34" charset="-120"/>
               </a:rPr>
-              <a:t>회오리감자 · 소떡소떡</a:t>
-            </a:r>
-            <a:endParaRPr lang="en-US" sz="1500" dirty="0"/>
-          </a:p>
-        </p:txBody>
-      </p:sp>
-      <p:sp>
-        <p:nvSpPr>
-          <p:cNvPr id="20" name="Text 17"/>
-          <p:cNvSpPr txBox="1"/>
-          <p:nvPr/>
-        </p:nvSpPr>
-        <p:spPr>
-          <a:xfrm>
-            <a:off x="566928" y="8616696"/>
-            <a:ext cx="1972056" cy="960120"/>
+              <a:t>빙수</a:t>
+            </a:r>
+            <a:endParaRPr lang="en-US" sz="1300" dirty="0"/>
+          </a:p>
+        </p:txBody>
+      </p:sp>
+      <p:sp>
+        <p:nvSpPr>
+          <p:cNvPr id="17" name="Text 15"/>
+          <p:cNvSpPr txBox="1"/>
+          <p:nvPr/>
+        </p:nvSpPr>
+        <p:spPr>
+          <a:xfrm>
+            <a:off x="9721901" y="1735836"/>
+            <a:ext cx="2012594" cy="1124712"/>
           </a:xfrm>
           <a:prstGeom prst="rect">
             <a:avLst/>
@@ -3575,12 +4211,12 @@
           <a:p>
             <a:pPr algn="l" indent="0" marL="0">
               <a:lnSpc>
-                <a:spcPct val="124000"/>
+                <a:spcPct val="120000"/>
               </a:lnSpc>
               <a:buNone/>
             </a:pPr>
             <a:r>
-              <a:rPr lang="en-US" sz="950" dirty="0">
+              <a:rPr lang="en-US" sz="800" dirty="0">
                 <a:solidFill>
                   <a:srgbClr val="475569"/>
                 </a:solidFill>
@@ -3588,22 +4224,22 @@
                 <a:ea typeface="Malgun Gothic" pitchFamily="34" charset="-122"/>
                 <a:cs typeface="Malgun Gothic" pitchFamily="34" charset="-120"/>
               </a:rPr>
-              <a:t>4,000~5,000원대. 아이 동반 가족이 가장 먼저 서는 부스</a:t>
-            </a:r>
-            <a:endParaRPr lang="en-US" sz="950" dirty="0"/>
-          </a:p>
-        </p:txBody>
-      </p:sp>
-      <p:sp>
-        <p:nvSpPr>
-          <p:cNvPr id="21" name="Shape 18"/>
+              <a:t>컵빙수·사과빙수. 여름 야외 행사 전용 라인</a:t>
+            </a:r>
+            <a:endParaRPr lang="en-US" sz="800" dirty="0"/>
+          </a:p>
+        </p:txBody>
+      </p:sp>
+      <p:sp>
+        <p:nvSpPr>
+          <p:cNvPr id="18" name="Shape 16"/>
           <p:cNvSpPr/>
           <p:nvPr/>
         </p:nvSpPr>
         <p:spPr>
           <a:xfrm>
-            <a:off x="2795016" y="6150864"/>
-            <a:ext cx="1972056" cy="1972056"/>
+            <a:off x="457200" y="3204972"/>
+            <a:ext cx="1417320" cy="1417320"/>
           </a:xfrm>
           <a:prstGeom prst="rect">
             <a:avLst/>
@@ -3621,14 +4257,14 @@
       </p:sp>
       <p:sp>
         <p:nvSpPr>
-          <p:cNvPr id="22" name="Text 19"/>
-          <p:cNvSpPr txBox="1"/>
-          <p:nvPr/>
-        </p:nvSpPr>
-        <p:spPr>
-          <a:xfrm>
-            <a:off x="2795016" y="6954012"/>
-            <a:ext cx="1972056" cy="365760"/>
+          <p:cNvPr id="19" name="Text 17"/>
+          <p:cNvSpPr txBox="1"/>
+          <p:nvPr/>
+        </p:nvSpPr>
+        <p:spPr>
+          <a:xfrm>
+            <a:off x="457200" y="3749040"/>
+            <a:ext cx="1417320" cy="329184"/>
           </a:xfrm>
           <a:prstGeom prst="rect">
             <a:avLst/>
@@ -3644,7 +4280,7 @@
               <a:buNone/>
             </a:pPr>
             <a:r>
-              <a:rPr lang="en-US" sz="1100" dirty="0">
+              <a:rPr lang="en-US" sz="900" dirty="0">
                 <a:solidFill>
                   <a:srgbClr val="94A3B8"/>
                 </a:solidFill>
@@ -3654,20 +4290,20 @@
               </a:rPr>
               <a:t>사진 준비 중</a:t>
             </a:r>
-            <a:endParaRPr lang="en-US" sz="1100" dirty="0"/>
-          </a:p>
-        </p:txBody>
-      </p:sp>
-      <p:sp>
-        <p:nvSpPr>
-          <p:cNvPr id="23" name="Text 20"/>
-          <p:cNvSpPr txBox="1"/>
-          <p:nvPr/>
-        </p:nvSpPr>
-        <p:spPr>
-          <a:xfrm>
-            <a:off x="2795016" y="8232648"/>
-            <a:ext cx="1972056" cy="384048"/>
+            <a:endParaRPr lang="en-US" sz="900" dirty="0"/>
+          </a:p>
+        </p:txBody>
+      </p:sp>
+      <p:sp>
+        <p:nvSpPr>
+          <p:cNvPr id="20" name="Text 18"/>
+          <p:cNvSpPr txBox="1"/>
+          <p:nvPr/>
+        </p:nvSpPr>
+        <p:spPr>
+          <a:xfrm>
+            <a:off x="2020824" y="3204972"/>
+            <a:ext cx="2012594" cy="292608"/>
           </a:xfrm>
           <a:prstGeom prst="rect">
             <a:avLst/>
@@ -3683,7 +4319,7 @@
               <a:buNone/>
             </a:pPr>
             <a:r>
-              <a:rPr lang="en-US" sz="1500" b="1" dirty="0">
+              <a:rPr lang="en-US" sz="1300" b="1" dirty="0">
                 <a:solidFill>
                   <a:srgbClr val="0F172A"/>
                 </a:solidFill>
@@ -3691,22 +4327,22 @@
                 <a:ea typeface="Malgun Gothic" pitchFamily="34" charset="-122"/>
                 <a:cs typeface="Malgun Gothic" pitchFamily="34" charset="-120"/>
               </a:rPr>
-              <a:t>핫도그</a:t>
-            </a:r>
-            <a:endParaRPr lang="en-US" sz="1500" dirty="0"/>
-          </a:p>
-        </p:txBody>
-      </p:sp>
-      <p:sp>
-        <p:nvSpPr>
-          <p:cNvPr id="24" name="Text 21"/>
-          <p:cNvSpPr txBox="1"/>
-          <p:nvPr/>
-        </p:nvSpPr>
-        <p:spPr>
-          <a:xfrm>
-            <a:off x="2795016" y="8616696"/>
-            <a:ext cx="1972056" cy="960120"/>
+              <a:t>스페셜티 커피</a:t>
+            </a:r>
+            <a:endParaRPr lang="en-US" sz="1300" dirty="0"/>
+          </a:p>
+        </p:txBody>
+      </p:sp>
+      <p:sp>
+        <p:nvSpPr>
+          <p:cNvPr id="21" name="Text 19"/>
+          <p:cNvSpPr txBox="1"/>
+          <p:nvPr/>
+        </p:nvSpPr>
+        <p:spPr>
+          <a:xfrm>
+            <a:off x="2020824" y="3497580"/>
+            <a:ext cx="2012594" cy="1124712"/>
           </a:xfrm>
           <a:prstGeom prst="rect">
             <a:avLst/>
@@ -3720,12 +4356,12 @@
           <a:p>
             <a:pPr algn="l" indent="0" marL="0">
               <a:lnSpc>
-                <a:spcPct val="124000"/>
+                <a:spcPct val="120000"/>
               </a:lnSpc>
               <a:buNone/>
             </a:pPr>
             <a:r>
-              <a:rPr lang="en-US" sz="950" dirty="0">
+              <a:rPr lang="en-US" sz="800" dirty="0">
                 <a:solidFill>
                   <a:srgbClr val="475569"/>
                 </a:solidFill>
@@ -3733,22 +4369,22 @@
                 <a:ea typeface="Malgun Gothic" pitchFamily="34" charset="-122"/>
                 <a:cs typeface="Malgun Gothic" pitchFamily="34" charset="-120"/>
               </a:rPr>
-              <a:t>뉴욕핫도그·옛날핫도그. 한 손 취식형 저단가 메뉴</a:t>
-            </a:r>
-            <a:endParaRPr lang="en-US" sz="950" dirty="0"/>
-          </a:p>
-        </p:txBody>
-      </p:sp>
-      <p:sp>
-        <p:nvSpPr>
-          <p:cNvPr id="25" name="Shape 22"/>
+              <a:t>스페셜티 수준 커피 케이터링. 기업 행사·전시에 적합</a:t>
+            </a:r>
+            <a:endParaRPr lang="en-US" sz="800" dirty="0"/>
+          </a:p>
+        </p:txBody>
+      </p:sp>
+      <p:sp>
+        <p:nvSpPr>
+          <p:cNvPr id="22" name="Shape 20"/>
           <p:cNvSpPr/>
           <p:nvPr/>
         </p:nvSpPr>
         <p:spPr>
           <a:xfrm>
-            <a:off x="5023104" y="6150864"/>
-            <a:ext cx="1972056" cy="1972056"/>
+            <a:off x="4307738" y="3204972"/>
+            <a:ext cx="1417320" cy="1417320"/>
           </a:xfrm>
           <a:prstGeom prst="rect">
             <a:avLst/>
@@ -3766,14 +4402,14 @@
       </p:sp>
       <p:sp>
         <p:nvSpPr>
-          <p:cNvPr id="26" name="Text 23"/>
-          <p:cNvSpPr txBox="1"/>
-          <p:nvPr/>
-        </p:nvSpPr>
-        <p:spPr>
-          <a:xfrm>
-            <a:off x="5023104" y="6954012"/>
-            <a:ext cx="1972056" cy="365760"/>
+          <p:cNvPr id="23" name="Text 21"/>
+          <p:cNvSpPr txBox="1"/>
+          <p:nvPr/>
+        </p:nvSpPr>
+        <p:spPr>
+          <a:xfrm>
+            <a:off x="4307738" y="3749040"/>
+            <a:ext cx="1417320" cy="329184"/>
           </a:xfrm>
           <a:prstGeom prst="rect">
             <a:avLst/>
@@ -3789,7 +4425,7 @@
               <a:buNone/>
             </a:pPr>
             <a:r>
-              <a:rPr lang="en-US" sz="1100" dirty="0">
+              <a:rPr lang="en-US" sz="900" dirty="0">
                 <a:solidFill>
                   <a:srgbClr val="94A3B8"/>
                 </a:solidFill>
@@ -3799,20 +4435,20 @@
               </a:rPr>
               <a:t>사진 준비 중</a:t>
             </a:r>
-            <a:endParaRPr lang="en-US" sz="1100" dirty="0"/>
-          </a:p>
-        </p:txBody>
-      </p:sp>
-      <p:sp>
-        <p:nvSpPr>
-          <p:cNvPr id="27" name="Text 24"/>
-          <p:cNvSpPr txBox="1"/>
-          <p:nvPr/>
-        </p:nvSpPr>
-        <p:spPr>
-          <a:xfrm>
-            <a:off x="5023104" y="8232648"/>
-            <a:ext cx="1972056" cy="384048"/>
+            <a:endParaRPr lang="en-US" sz="900" dirty="0"/>
+          </a:p>
+        </p:txBody>
+      </p:sp>
+      <p:sp>
+        <p:nvSpPr>
+          <p:cNvPr id="24" name="Text 22"/>
+          <p:cNvSpPr txBox="1"/>
+          <p:nvPr/>
+        </p:nvSpPr>
+        <p:spPr>
+          <a:xfrm>
+            <a:off x="5871362" y="3204972"/>
+            <a:ext cx="2012594" cy="292608"/>
           </a:xfrm>
           <a:prstGeom prst="rect">
             <a:avLst/>
@@ -3828,7 +4464,7 @@
               <a:buNone/>
             </a:pPr>
             <a:r>
-              <a:rPr lang="en-US" sz="1500" b="1" dirty="0">
+              <a:rPr lang="en-US" sz="1300" b="1" dirty="0">
                 <a:solidFill>
                   <a:srgbClr val="0F172A"/>
                 </a:solidFill>
@@ -3836,22 +4472,22 @@
                 <a:ea typeface="Malgun Gothic" pitchFamily="34" charset="-122"/>
                 <a:cs typeface="Malgun Gothic" pitchFamily="34" charset="-120"/>
               </a:rPr>
-              <a:t>새우꼬치 · 부산어묵</a:t>
-            </a:r>
-            <a:endParaRPr lang="en-US" sz="1500" dirty="0"/>
-          </a:p>
-        </p:txBody>
-      </p:sp>
-      <p:sp>
-        <p:nvSpPr>
-          <p:cNvPr id="28" name="Text 25"/>
-          <p:cNvSpPr txBox="1"/>
-          <p:nvPr/>
-        </p:nvSpPr>
-        <p:spPr>
-          <a:xfrm>
-            <a:off x="5023104" y="8616696"/>
-            <a:ext cx="1972056" cy="960120"/>
+              <a:t>커피 · 베이커리</a:t>
+            </a:r>
+            <a:endParaRPr lang="en-US" sz="1300" dirty="0"/>
+          </a:p>
+        </p:txBody>
+      </p:sp>
+      <p:sp>
+        <p:nvSpPr>
+          <p:cNvPr id="25" name="Text 23"/>
+          <p:cNvSpPr txBox="1"/>
+          <p:nvPr/>
+        </p:nvSpPr>
+        <p:spPr>
+          <a:xfrm>
+            <a:off x="5871362" y="3497580"/>
+            <a:ext cx="2012594" cy="1124712"/>
           </a:xfrm>
           <a:prstGeom prst="rect">
             <a:avLst/>
@@ -3865,12 +4501,12 @@
           <a:p>
             <a:pPr algn="l" indent="0" marL="0">
               <a:lnSpc>
-                <a:spcPct val="124000"/>
+                <a:spcPct val="120000"/>
               </a:lnSpc>
               <a:buNone/>
             </a:pPr>
             <a:r>
-              <a:rPr lang="en-US" sz="950" dirty="0">
+              <a:rPr lang="en-US" sz="800" dirty="0">
                 <a:solidFill>
                   <a:srgbClr val="475569"/>
                 </a:solidFill>
@@ -3878,46 +4514,7 @@
                 <a:ea typeface="Malgun Gothic" pitchFamily="34" charset="-122"/>
                 <a:cs typeface="Malgun Gothic" pitchFamily="34" charset="-120"/>
               </a:rPr>
-              <a:t>레몬새우·칠리새우와 어묵 3꼬치 4,000원 구성</a:t>
-            </a:r>
-            <a:endParaRPr lang="en-US" sz="950" dirty="0"/>
-          </a:p>
-        </p:txBody>
-      </p:sp>
-      <p:sp>
-        <p:nvSpPr>
-          <p:cNvPr id="29" name="Text 26"/>
-          <p:cNvSpPr txBox="1"/>
-          <p:nvPr/>
-        </p:nvSpPr>
-        <p:spPr>
-          <a:xfrm>
-            <a:off x="566928" y="10122408"/>
-            <a:ext cx="6428232" cy="274320"/>
-          </a:xfrm>
-          <a:prstGeom prst="rect">
-            <a:avLst/>
-          </a:prstGeom>
-          <a:noFill/>
-          <a:ln/>
-        </p:spPr>
-        <p:txBody>
-          <a:bodyPr wrap="square" rtlCol="0" anchor="ctr"/>
-          <a:lstStyle/>
-          <a:p>
-            <a:pPr algn="l" indent="0" marL="0">
-              <a:buNone/>
-            </a:pPr>
-            <a:r>
-              <a:rPr lang="en-US" sz="800" dirty="0">
-                <a:solidFill>
-                  <a:srgbClr val="94A3B8"/>
-                </a:solidFill>
-                <a:latin typeface="Malgun Gothic" pitchFamily="34" charset="0"/>
-                <a:ea typeface="Malgun Gothic" pitchFamily="34" charset="-122"/>
-                <a:cs typeface="Malgun Gothic" pitchFamily="34" charset="-120"/>
-              </a:rPr>
-              <a:t>플릿 유니온 · www.flitunion.com</a:t>
+              <a:t>프리미엄 커피에 당일 구운 베이커리를 함께 운영</a:t>
             </a:r>
             <a:endParaRPr lang="en-US" sz="800" dirty="0"/>
           </a:p>
@@ -3925,229 +4522,14 @@
       </p:sp>
       <p:sp>
         <p:nvSpPr>
-          <p:cNvPr id="30" name="Text 27"/>
-          <p:cNvSpPr txBox="1"/>
-          <p:nvPr/>
-        </p:nvSpPr>
-        <p:spPr>
-          <a:xfrm>
-            <a:off x="566928" y="10122408"/>
-            <a:ext cx="6428232" cy="274320"/>
-          </a:xfrm>
-          <a:prstGeom prst="rect">
-            <a:avLst/>
-          </a:prstGeom>
-          <a:noFill/>
-          <a:ln/>
-        </p:spPr>
-        <p:txBody>
-          <a:bodyPr wrap="square" rtlCol="0" anchor="ctr"/>
-          <a:lstStyle/>
-          <a:p>
-            <a:pPr algn="r" indent="0" marL="0">
-              <a:buNone/>
-            </a:pPr>
-            <a:r>
-              <a:rPr lang="en-US" sz="800" dirty="0">
-                <a:solidFill>
-                  <a:srgbClr val="94A3B8"/>
-                </a:solidFill>
-                <a:latin typeface="Malgun Gothic" pitchFamily="34" charset="0"/>
-                <a:ea typeface="Malgun Gothic" pitchFamily="34" charset="-122"/>
-                <a:cs typeface="Malgun Gothic" pitchFamily="34" charset="-120"/>
-              </a:rPr>
-              <a:t>3 / 4</a:t>
-            </a:r>
-            <a:endParaRPr lang="en-US" sz="800" dirty="0"/>
-          </a:p>
-        </p:txBody>
-      </p:sp>
-    </p:spTree>
-  </p:cSld>
-  <p:clrMapOvr>
-    <a:masterClrMapping/>
-  </p:clrMapOvr>
-</p:sld>
-</file>
-
-<file path=ppt/slides/slide4.xml><?xml version="1.0" encoding="utf-8"?>
-<p:sld xmlns:a="http://schemas.openxmlformats.org/drawingml/2006/main" xmlns:r="http://schemas.openxmlformats.org/officeDocument/2006/relationships" xmlns:p="http://schemas.openxmlformats.org/presentationml/2006/main">
-  <p:cSld name="Slide 4">
-    <p:bg>
-      <p:bgPr>
-        <a:solidFill>
-          <a:srgbClr val="FFFFFF"/>
-        </a:solidFill>
-      </p:bgPr>
-    </p:bg>
-    <p:spTree>
-      <p:nvGrpSpPr>
-        <p:cNvPr id="1" name=""/>
-        <p:cNvGrpSpPr/>
-        <p:nvPr/>
-      </p:nvGrpSpPr>
-      <p:grpSpPr>
-        <a:xfrm>
-          <a:off x="0" y="0"/>
-          <a:ext cx="0" cy="0"/>
-          <a:chOff x="0" y="0"/>
-          <a:chExt cx="0" cy="0"/>
-        </a:xfrm>
-      </p:grpSpPr>
-      <p:sp>
-        <p:nvSpPr>
-          <p:cNvPr id="2" name="Text 0"/>
+          <p:cNvPr id="26" name="Shape 24"/>
           <p:cNvSpPr/>
           <p:nvPr/>
         </p:nvSpPr>
         <p:spPr>
           <a:xfrm>
-            <a:off x="0" y="566928"/>
-            <a:ext cx="7562088" cy="566928"/>
-          </a:xfrm>
-          <a:prstGeom prst="rect">
-            <a:avLst/>
-          </a:prstGeom>
-          <a:noFill/>
-          <a:ln/>
-        </p:spPr>
-        <p:txBody>
-          <a:bodyPr wrap="square" rtlCol="0" anchor="ctr"/>
-          <a:lstStyle/>
-          <a:p>
-            <a:pPr algn="ctr" indent="0" marL="0">
-              <a:buNone/>
-            </a:pPr>
-            <a:r>
-              <a:rPr lang="en-US" sz="3400" b="1" spc="100" kern="0" dirty="0">
-                <a:solidFill>
-                  <a:srgbClr val="3182F6"/>
-                </a:solidFill>
-                <a:latin typeface="Malgun Gothic" pitchFamily="34" charset="0"/>
-                <a:ea typeface="Malgun Gothic" pitchFamily="34" charset="-122"/>
-                <a:cs typeface="Malgun Gothic" pitchFamily="34" charset="-120"/>
-              </a:rPr>
-              <a:t>플릿 유니온</a:t>
-            </a:r>
-            <a:endParaRPr lang="en-US" sz="3400" dirty="0"/>
-          </a:p>
-        </p:txBody>
-      </p:sp>
-      <p:sp>
-        <p:nvSpPr>
-          <p:cNvPr id="3" name="Text 1"/>
-          <p:cNvSpPr/>
-          <p:nvPr/>
-        </p:nvSpPr>
-        <p:spPr>
-          <a:xfrm>
-            <a:off x="0" y="1078992"/>
-            <a:ext cx="7562088" cy="713232"/>
-          </a:xfrm>
-          <a:prstGeom prst="rect">
-            <a:avLst/>
-          </a:prstGeom>
-          <a:noFill/>
-          <a:ln/>
-        </p:spPr>
-        <p:txBody>
-          <a:bodyPr wrap="square" rtlCol="0" anchor="ctr"/>
-          <a:lstStyle/>
-          <a:p>
-            <a:pPr algn="ctr" indent="0" marL="0">
-              <a:buNone/>
-            </a:pPr>
-            <a:r>
-              <a:rPr lang="en-US" sz="4400" b="1" dirty="0">
-                <a:solidFill>
-                  <a:srgbClr val="0B1F44"/>
-                </a:solidFill>
-                <a:latin typeface="Malgun Gothic" pitchFamily="34" charset="0"/>
-                <a:ea typeface="Malgun Gothic" pitchFamily="34" charset="-122"/>
-                <a:cs typeface="Malgun Gothic" pitchFamily="34" charset="-120"/>
-              </a:rPr>
-              <a:t>푸드트럭 메뉴</a:t>
-            </a:r>
-            <a:endParaRPr lang="en-US" sz="4400" dirty="0"/>
-          </a:p>
-        </p:txBody>
-      </p:sp>
-      <p:sp>
-        <p:nvSpPr>
-          <p:cNvPr id="4" name="Shape 2"/>
-          <p:cNvSpPr/>
-          <p:nvPr/>
-        </p:nvSpPr>
-        <p:spPr>
-          <a:xfrm>
-            <a:off x="1220724" y="1847088"/>
-            <a:ext cx="5120640" cy="402336"/>
-          </a:xfrm>
-          <a:prstGeom prst="roundRect">
-            <a:avLst>
-              <a:gd name="adj" fmla="val 50000"/>
-            </a:avLst>
-          </a:prstGeom>
-          <a:solidFill>
-            <a:srgbClr val="EAF2FF"/>
-          </a:solidFill>
-          <a:ln w="12700">
-            <a:solidFill>
-              <a:srgbClr val="EAF2FF"/>
-            </a:solidFill>
-            <a:prstDash val="solid"/>
-          </a:ln>
-        </p:spPr>
-      </p:sp>
-      <p:sp>
-        <p:nvSpPr>
-          <p:cNvPr id="5" name="Text 3"/>
-          <p:cNvSpPr txBox="1"/>
-          <p:nvPr/>
-        </p:nvSpPr>
-        <p:spPr>
-          <a:xfrm>
-            <a:off x="1220724" y="1847088"/>
-            <a:ext cx="5120640" cy="402336"/>
-          </a:xfrm>
-          <a:prstGeom prst="rect">
-            <a:avLst/>
-          </a:prstGeom>
-          <a:noFill/>
-          <a:ln/>
-        </p:spPr>
-        <p:txBody>
-          <a:bodyPr wrap="square" rtlCol="0" anchor="ctr"/>
-          <a:lstStyle/>
-          <a:p>
-            <a:pPr algn="ctr" indent="0" marL="0">
-              <a:buNone/>
-            </a:pPr>
-            <a:r>
-              <a:rPr lang="en-US" sz="1300" b="1" dirty="0">
-                <a:solidFill>
-                  <a:srgbClr val="0B1F44"/>
-                </a:solidFill>
-                <a:latin typeface="Malgun Gothic" pitchFamily="34" charset="0"/>
-                <a:ea typeface="Malgun Gothic" pitchFamily="34" charset="-122"/>
-                <a:cs typeface="Malgun Gothic" pitchFamily="34" charset="-120"/>
-              </a:rPr>
-              <a:t>· 간식 · 음료 확장 ·</a:t>
-            </a:r>
-            <a:endParaRPr lang="en-US" sz="1300" dirty="0"/>
-          </a:p>
-        </p:txBody>
-      </p:sp>
-      <p:sp>
-        <p:nvSpPr>
-          <p:cNvPr id="6" name="Shape 4"/>
-          <p:cNvSpPr/>
-          <p:nvPr/>
-        </p:nvSpPr>
-        <p:spPr>
-          <a:xfrm>
-            <a:off x="566928" y="2395728"/>
-            <a:ext cx="1972056" cy="1972056"/>
+            <a:off x="8158277" y="3204972"/>
+            <a:ext cx="1417320" cy="1417320"/>
           </a:xfrm>
           <a:prstGeom prst="rect">
             <a:avLst/>
@@ -4165,14 +4547,14 @@
       </p:sp>
       <p:sp>
         <p:nvSpPr>
-          <p:cNvPr id="7" name="Text 5"/>
-          <p:cNvSpPr txBox="1"/>
-          <p:nvPr/>
-        </p:nvSpPr>
-        <p:spPr>
-          <a:xfrm>
-            <a:off x="566928" y="3198876"/>
-            <a:ext cx="1972056" cy="365760"/>
+          <p:cNvPr id="27" name="Text 25"/>
+          <p:cNvSpPr txBox="1"/>
+          <p:nvPr/>
+        </p:nvSpPr>
+        <p:spPr>
+          <a:xfrm>
+            <a:off x="8158277" y="3749040"/>
+            <a:ext cx="1417320" cy="329184"/>
           </a:xfrm>
           <a:prstGeom prst="rect">
             <a:avLst/>
@@ -4188,7 +4570,7 @@
               <a:buNone/>
             </a:pPr>
             <a:r>
-              <a:rPr lang="en-US" sz="1100" dirty="0">
+              <a:rPr lang="en-US" sz="900" dirty="0">
                 <a:solidFill>
                   <a:srgbClr val="94A3B8"/>
                 </a:solidFill>
@@ -4198,20 +4580,20 @@
               </a:rPr>
               <a:t>사진 준비 중</a:t>
             </a:r>
-            <a:endParaRPr lang="en-US" sz="1100" dirty="0"/>
-          </a:p>
-        </p:txBody>
-      </p:sp>
-      <p:sp>
-        <p:nvSpPr>
-          <p:cNvPr id="8" name="Text 6"/>
-          <p:cNvSpPr txBox="1"/>
-          <p:nvPr/>
-        </p:nvSpPr>
-        <p:spPr>
-          <a:xfrm>
-            <a:off x="566928" y="4477512"/>
-            <a:ext cx="1972056" cy="384048"/>
+            <a:endParaRPr lang="en-US" sz="900" dirty="0"/>
+          </a:p>
+        </p:txBody>
+      </p:sp>
+      <p:sp>
+        <p:nvSpPr>
+          <p:cNvPr id="28" name="Text 26"/>
+          <p:cNvSpPr txBox="1"/>
+          <p:nvPr/>
+        </p:nvSpPr>
+        <p:spPr>
+          <a:xfrm>
+            <a:off x="9721901" y="3204972"/>
+            <a:ext cx="2012594" cy="292608"/>
           </a:xfrm>
           <a:prstGeom prst="rect">
             <a:avLst/>
@@ -4227,7 +4609,7 @@
               <a:buNone/>
             </a:pPr>
             <a:r>
-              <a:rPr lang="en-US" sz="1500" b="1" dirty="0">
+              <a:rPr lang="en-US" sz="1300" b="1" dirty="0">
                 <a:solidFill>
                   <a:srgbClr val="0F172A"/>
                 </a:solidFill>
@@ -4235,22 +4617,22 @@
                 <a:ea typeface="Malgun Gothic" pitchFamily="34" charset="-122"/>
                 <a:cs typeface="Malgun Gothic" pitchFamily="34" charset="-120"/>
               </a:rPr>
-              <a:t>새우튀김 · 새우버거</a:t>
-            </a:r>
-            <a:endParaRPr lang="en-US" sz="1500" dirty="0"/>
-          </a:p>
-        </p:txBody>
-      </p:sp>
-      <p:sp>
-        <p:nvSpPr>
-          <p:cNvPr id="9" name="Text 7"/>
-          <p:cNvSpPr txBox="1"/>
-          <p:nvPr/>
-        </p:nvSpPr>
-        <p:spPr>
-          <a:xfrm>
-            <a:off x="566928" y="4861560"/>
-            <a:ext cx="1972056" cy="960120"/>
+              <a:t>칵테일 · 주류</a:t>
+            </a:r>
+            <a:endParaRPr lang="en-US" sz="1300" dirty="0"/>
+          </a:p>
+        </p:txBody>
+      </p:sp>
+      <p:sp>
+        <p:nvSpPr>
+          <p:cNvPr id="29" name="Text 27"/>
+          <p:cNvSpPr txBox="1"/>
+          <p:nvPr/>
+        </p:nvSpPr>
+        <p:spPr>
+          <a:xfrm>
+            <a:off x="9721901" y="3497580"/>
+            <a:ext cx="2012594" cy="1124712"/>
           </a:xfrm>
           <a:prstGeom prst="rect">
             <a:avLst/>
@@ -4264,12 +4646,12 @@
           <a:p>
             <a:pPr algn="l" indent="0" marL="0">
               <a:lnSpc>
-                <a:spcPct val="124000"/>
+                <a:spcPct val="120000"/>
               </a:lnSpc>
               <a:buNone/>
             </a:pPr>
             <a:r>
-              <a:rPr lang="en-US" sz="950" dirty="0">
+              <a:rPr lang="en-US" sz="800" dirty="0">
                 <a:solidFill>
                   <a:srgbClr val="475569"/>
                 </a:solidFill>
@@ -4277,47 +4659,61 @@
                 <a:ea typeface="Malgun Gothic" pitchFamily="34" charset="-122"/>
                 <a:cs typeface="Malgun Gothic" pitchFamily="34" charset="-120"/>
               </a:rPr>
-              <a:t>튀김류 중심 구성. 감자튀김 사이드 운영</a:t>
-            </a:r>
-            <a:endParaRPr lang="en-US" sz="950" dirty="0"/>
-          </a:p>
-        </p:txBody>
-      </p:sp>
-      <p:sp>
-        <p:nvSpPr>
-          <p:cNvPr id="10" name="Shape 8"/>
-          <p:cNvSpPr/>
-          <p:nvPr/>
-        </p:nvSpPr>
-        <p:spPr>
-          <a:xfrm>
-            <a:off x="2795016" y="2395728"/>
-            <a:ext cx="1972056" cy="1972056"/>
-          </a:xfrm>
-          <a:prstGeom prst="rect">
-            <a:avLst/>
-          </a:prstGeom>
-          <a:solidFill>
-            <a:srgbClr val="F4F7FC"/>
-          </a:solidFill>
-          <a:ln w="12700">
-            <a:solidFill>
-              <a:srgbClr val="DBE6F6"/>
-            </a:solidFill>
-            <a:prstDash val="solid"/>
-          </a:ln>
-        </p:spPr>
-      </p:sp>
-      <p:sp>
-        <p:nvSpPr>
-          <p:cNvPr id="11" name="Text 9"/>
-          <p:cNvSpPr txBox="1"/>
-          <p:nvPr/>
-        </p:nvSpPr>
-        <p:spPr>
-          <a:xfrm>
-            <a:off x="2795016" y="3198876"/>
-            <a:ext cx="1972056" cy="365760"/>
+              <a:t>야간 행사 전용. 주류 판매 가능 여부는 장소별 확인 필요</a:t>
+            </a:r>
+            <a:endParaRPr lang="en-US" sz="800" dirty="0"/>
+          </a:p>
+        </p:txBody>
+      </p:sp>
+      <p:sp>
+        <p:nvSpPr>
+          <p:cNvPr id="30" name="Text 28"/>
+          <p:cNvSpPr txBox="1"/>
+          <p:nvPr/>
+        </p:nvSpPr>
+        <p:spPr>
+          <a:xfrm>
+            <a:off x="457200" y="6492240"/>
+            <a:ext cx="10637215" cy="274320"/>
+          </a:xfrm>
+          <a:prstGeom prst="rect">
+            <a:avLst/>
+          </a:prstGeom>
+          <a:noFill/>
+          <a:ln/>
+        </p:spPr>
+        <p:txBody>
+          <a:bodyPr wrap="square" rtlCol="0" anchor="t"/>
+          <a:lstStyle/>
+          <a:p>
+            <a:pPr algn="l" indent="0" marL="0">
+              <a:buNone/>
+            </a:pPr>
+            <a:r>
+              <a:rPr lang="en-US" sz="750" dirty="0">
+                <a:solidFill>
+                  <a:srgbClr val="94A3B8"/>
+                </a:solidFill>
+                <a:latin typeface="Malgun Gothic" pitchFamily="34" charset="0"/>
+                <a:ea typeface="Malgun Gothic" pitchFamily="34" charset="-122"/>
+                <a:cs typeface="Malgun Gothic" pitchFamily="34" charset="-120"/>
+              </a:rPr>
+              <a:t>플릿 유니온 · www.flitunion.com</a:t>
+            </a:r>
+            <a:endParaRPr lang="en-US" sz="750" dirty="0"/>
+          </a:p>
+        </p:txBody>
+      </p:sp>
+      <p:sp>
+        <p:nvSpPr>
+          <p:cNvPr id="31" name="Text 29"/>
+          <p:cNvSpPr txBox="1"/>
+          <p:nvPr/>
+        </p:nvSpPr>
+        <p:spPr>
+          <a:xfrm>
+            <a:off x="457200" y="6492240"/>
+            <a:ext cx="11277295" cy="274320"/>
           </a:xfrm>
           <a:prstGeom prst="rect">
             <a:avLst/>
@@ -4329,11 +4725,11 @@
           <a:bodyPr wrap="square" rtlCol="0" anchor="ctr"/>
           <a:lstStyle/>
           <a:p>
-            <a:pPr algn="ctr" indent="0" marL="0">
-              <a:buNone/>
-            </a:pPr>
-            <a:r>
-              <a:rPr lang="en-US" sz="1100" dirty="0">
+            <a:pPr algn="r" indent="0" marL="0">
+              <a:buNone/>
+            </a:pPr>
+            <a:r>
+              <a:rPr lang="en-US" sz="750" dirty="0">
                 <a:solidFill>
                   <a:srgbClr val="94A3B8"/>
                 </a:solidFill>
@@ -4341,748 +4737,9 @@
                 <a:ea typeface="Malgun Gothic" pitchFamily="34" charset="-122"/>
                 <a:cs typeface="Malgun Gothic" pitchFamily="34" charset="-120"/>
               </a:rPr>
-              <a:t>사진 준비 중</a:t>
-            </a:r>
-            <a:endParaRPr lang="en-US" sz="1100" dirty="0"/>
-          </a:p>
-        </p:txBody>
-      </p:sp>
-      <p:sp>
-        <p:nvSpPr>
-          <p:cNvPr id="12" name="Text 10"/>
-          <p:cNvSpPr txBox="1"/>
-          <p:nvPr/>
-        </p:nvSpPr>
-        <p:spPr>
-          <a:xfrm>
-            <a:off x="2795016" y="4477512"/>
-            <a:ext cx="1972056" cy="384048"/>
-          </a:xfrm>
-          <a:prstGeom prst="rect">
-            <a:avLst/>
-          </a:prstGeom>
-          <a:noFill/>
-          <a:ln/>
-        </p:spPr>
-        <p:txBody>
-          <a:bodyPr wrap="square" rtlCol="0" anchor="t"/>
-          <a:lstStyle/>
-          <a:p>
-            <a:pPr algn="l" indent="0" marL="0">
-              <a:buNone/>
-            </a:pPr>
-            <a:r>
-              <a:rPr lang="en-US" sz="1500" b="1" dirty="0">
-                <a:solidFill>
-                  <a:srgbClr val="0F172A"/>
-                </a:solidFill>
-                <a:latin typeface="Malgun Gothic" pitchFamily="34" charset="0"/>
-                <a:ea typeface="Malgun Gothic" pitchFamily="34" charset="-122"/>
-                <a:cs typeface="Malgun Gothic" pitchFamily="34" charset="-120"/>
-              </a:rPr>
-              <a:t>충무김밥</a:t>
-            </a:r>
-            <a:endParaRPr lang="en-US" sz="1500" dirty="0"/>
-          </a:p>
-        </p:txBody>
-      </p:sp>
-      <p:sp>
-        <p:nvSpPr>
-          <p:cNvPr id="13" name="Text 11"/>
-          <p:cNvSpPr txBox="1"/>
-          <p:nvPr/>
-        </p:nvSpPr>
-        <p:spPr>
-          <a:xfrm>
-            <a:off x="2795016" y="4861560"/>
-            <a:ext cx="1972056" cy="960120"/>
-          </a:xfrm>
-          <a:prstGeom prst="rect">
-            <a:avLst/>
-          </a:prstGeom>
-          <a:noFill/>
-          <a:ln/>
-        </p:spPr>
-        <p:txBody>
-          <a:bodyPr wrap="square" rtlCol="0" anchor="t"/>
-          <a:lstStyle/>
-          <a:p>
-            <a:pPr algn="l" indent="0" marL="0">
-              <a:lnSpc>
-                <a:spcPct val="124000"/>
-              </a:lnSpc>
-              <a:buNone/>
-            </a:pPr>
-            <a:r>
-              <a:rPr lang="en-US" sz="950" dirty="0">
-                <a:solidFill>
-                  <a:srgbClr val="475569"/>
-                </a:solidFill>
-                <a:latin typeface="Malgun Gothic" pitchFamily="34" charset="0"/>
-                <a:ea typeface="Malgun Gothic" pitchFamily="34" charset="-122"/>
-                <a:cs typeface="Malgun Gothic" pitchFamily="34" charset="-120"/>
-              </a:rPr>
-              <a:t>포장 도시락형. 앉을 자리가 있는 행사에 적합</a:t>
-            </a:r>
-            <a:endParaRPr lang="en-US" sz="950" dirty="0"/>
-          </a:p>
-        </p:txBody>
-      </p:sp>
-      <p:sp>
-        <p:nvSpPr>
-          <p:cNvPr id="14" name="Shape 12"/>
-          <p:cNvSpPr/>
-          <p:nvPr/>
-        </p:nvSpPr>
-        <p:spPr>
-          <a:xfrm>
-            <a:off x="5023104" y="2395728"/>
-            <a:ext cx="1972056" cy="1972056"/>
-          </a:xfrm>
-          <a:prstGeom prst="rect">
-            <a:avLst/>
-          </a:prstGeom>
-          <a:solidFill>
-            <a:srgbClr val="F4F7FC"/>
-          </a:solidFill>
-          <a:ln w="12700">
-            <a:solidFill>
-              <a:srgbClr val="DBE6F6"/>
-            </a:solidFill>
-            <a:prstDash val="solid"/>
-          </a:ln>
-        </p:spPr>
-      </p:sp>
-      <p:sp>
-        <p:nvSpPr>
-          <p:cNvPr id="15" name="Text 13"/>
-          <p:cNvSpPr txBox="1"/>
-          <p:nvPr/>
-        </p:nvSpPr>
-        <p:spPr>
-          <a:xfrm>
-            <a:off x="5023104" y="3198876"/>
-            <a:ext cx="1972056" cy="365760"/>
-          </a:xfrm>
-          <a:prstGeom prst="rect">
-            <a:avLst/>
-          </a:prstGeom>
-          <a:noFill/>
-          <a:ln/>
-        </p:spPr>
-        <p:txBody>
-          <a:bodyPr wrap="square" rtlCol="0" anchor="ctr"/>
-          <a:lstStyle/>
-          <a:p>
-            <a:pPr algn="ctr" indent="0" marL="0">
-              <a:buNone/>
-            </a:pPr>
-            <a:r>
-              <a:rPr lang="en-US" sz="1100" dirty="0">
-                <a:solidFill>
-                  <a:srgbClr val="94A3B8"/>
-                </a:solidFill>
-                <a:latin typeface="Malgun Gothic" pitchFamily="34" charset="0"/>
-                <a:ea typeface="Malgun Gothic" pitchFamily="34" charset="-122"/>
-                <a:cs typeface="Malgun Gothic" pitchFamily="34" charset="-120"/>
-              </a:rPr>
-              <a:t>사진 준비 중</a:t>
-            </a:r>
-            <a:endParaRPr lang="en-US" sz="1100" dirty="0"/>
-          </a:p>
-        </p:txBody>
-      </p:sp>
-      <p:sp>
-        <p:nvSpPr>
-          <p:cNvPr id="16" name="Text 14"/>
-          <p:cNvSpPr txBox="1"/>
-          <p:nvPr/>
-        </p:nvSpPr>
-        <p:spPr>
-          <a:xfrm>
-            <a:off x="5023104" y="4477512"/>
-            <a:ext cx="1972056" cy="384048"/>
-          </a:xfrm>
-          <a:prstGeom prst="rect">
-            <a:avLst/>
-          </a:prstGeom>
-          <a:noFill/>
-          <a:ln/>
-        </p:spPr>
-        <p:txBody>
-          <a:bodyPr wrap="square" rtlCol="0" anchor="t"/>
-          <a:lstStyle/>
-          <a:p>
-            <a:pPr algn="l" indent="0" marL="0">
-              <a:buNone/>
-            </a:pPr>
-            <a:r>
-              <a:rPr lang="en-US" sz="1500" b="1" dirty="0">
-                <a:solidFill>
-                  <a:srgbClr val="0F172A"/>
-                </a:solidFill>
-                <a:latin typeface="Malgun Gothic" pitchFamily="34" charset="0"/>
-                <a:ea typeface="Malgun Gothic" pitchFamily="34" charset="-122"/>
-                <a:cs typeface="Malgun Gothic" pitchFamily="34" charset="-120"/>
-              </a:rPr>
-              <a:t>빙수</a:t>
-            </a:r>
-            <a:endParaRPr lang="en-US" sz="1500" dirty="0"/>
-          </a:p>
-        </p:txBody>
-      </p:sp>
-      <p:sp>
-        <p:nvSpPr>
-          <p:cNvPr id="17" name="Text 15"/>
-          <p:cNvSpPr txBox="1"/>
-          <p:nvPr/>
-        </p:nvSpPr>
-        <p:spPr>
-          <a:xfrm>
-            <a:off x="5023104" y="4861560"/>
-            <a:ext cx="1972056" cy="960120"/>
-          </a:xfrm>
-          <a:prstGeom prst="rect">
-            <a:avLst/>
-          </a:prstGeom>
-          <a:noFill/>
-          <a:ln/>
-        </p:spPr>
-        <p:txBody>
-          <a:bodyPr wrap="square" rtlCol="0" anchor="t"/>
-          <a:lstStyle/>
-          <a:p>
-            <a:pPr algn="l" indent="0" marL="0">
-              <a:lnSpc>
-                <a:spcPct val="124000"/>
-              </a:lnSpc>
-              <a:buNone/>
-            </a:pPr>
-            <a:r>
-              <a:rPr lang="en-US" sz="950" dirty="0">
-                <a:solidFill>
-                  <a:srgbClr val="475569"/>
-                </a:solidFill>
-                <a:latin typeface="Malgun Gothic" pitchFamily="34" charset="0"/>
-                <a:ea typeface="Malgun Gothic" pitchFamily="34" charset="-122"/>
-                <a:cs typeface="Malgun Gothic" pitchFamily="34" charset="-120"/>
-              </a:rPr>
-              <a:t>컵빙수·사과빙수. 여름 야외 행사 전용 라인</a:t>
-            </a:r>
-            <a:endParaRPr lang="en-US" sz="950" dirty="0"/>
-          </a:p>
-        </p:txBody>
-      </p:sp>
-      <p:sp>
-        <p:nvSpPr>
-          <p:cNvPr id="18" name="Shape 16"/>
-          <p:cNvSpPr/>
-          <p:nvPr/>
-        </p:nvSpPr>
-        <p:spPr>
-          <a:xfrm>
-            <a:off x="566928" y="6150864"/>
-            <a:ext cx="1972056" cy="1972056"/>
-          </a:xfrm>
-          <a:prstGeom prst="rect">
-            <a:avLst/>
-          </a:prstGeom>
-          <a:solidFill>
-            <a:srgbClr val="F4F7FC"/>
-          </a:solidFill>
-          <a:ln w="12700">
-            <a:solidFill>
-              <a:srgbClr val="DBE6F6"/>
-            </a:solidFill>
-            <a:prstDash val="solid"/>
-          </a:ln>
-        </p:spPr>
-      </p:sp>
-      <p:sp>
-        <p:nvSpPr>
-          <p:cNvPr id="19" name="Text 17"/>
-          <p:cNvSpPr txBox="1"/>
-          <p:nvPr/>
-        </p:nvSpPr>
-        <p:spPr>
-          <a:xfrm>
-            <a:off x="566928" y="6954012"/>
-            <a:ext cx="1972056" cy="365760"/>
-          </a:xfrm>
-          <a:prstGeom prst="rect">
-            <a:avLst/>
-          </a:prstGeom>
-          <a:noFill/>
-          <a:ln/>
-        </p:spPr>
-        <p:txBody>
-          <a:bodyPr wrap="square" rtlCol="0" anchor="ctr"/>
-          <a:lstStyle/>
-          <a:p>
-            <a:pPr algn="ctr" indent="0" marL="0">
-              <a:buNone/>
-            </a:pPr>
-            <a:r>
-              <a:rPr lang="en-US" sz="1100" dirty="0">
-                <a:solidFill>
-                  <a:srgbClr val="94A3B8"/>
-                </a:solidFill>
-                <a:latin typeface="Malgun Gothic" pitchFamily="34" charset="0"/>
-                <a:ea typeface="Malgun Gothic" pitchFamily="34" charset="-122"/>
-                <a:cs typeface="Malgun Gothic" pitchFamily="34" charset="-120"/>
-              </a:rPr>
-              <a:t>사진 준비 중</a:t>
-            </a:r>
-            <a:endParaRPr lang="en-US" sz="1100" dirty="0"/>
-          </a:p>
-        </p:txBody>
-      </p:sp>
-      <p:sp>
-        <p:nvSpPr>
-          <p:cNvPr id="20" name="Text 18"/>
-          <p:cNvSpPr txBox="1"/>
-          <p:nvPr/>
-        </p:nvSpPr>
-        <p:spPr>
-          <a:xfrm>
-            <a:off x="566928" y="8232648"/>
-            <a:ext cx="1972056" cy="384048"/>
-          </a:xfrm>
-          <a:prstGeom prst="rect">
-            <a:avLst/>
-          </a:prstGeom>
-          <a:noFill/>
-          <a:ln/>
-        </p:spPr>
-        <p:txBody>
-          <a:bodyPr wrap="square" rtlCol="0" anchor="t"/>
-          <a:lstStyle/>
-          <a:p>
-            <a:pPr algn="l" indent="0" marL="0">
-              <a:buNone/>
-            </a:pPr>
-            <a:r>
-              <a:rPr lang="en-US" sz="1500" b="1" dirty="0">
-                <a:solidFill>
-                  <a:srgbClr val="0F172A"/>
-                </a:solidFill>
-                <a:latin typeface="Malgun Gothic" pitchFamily="34" charset="0"/>
-                <a:ea typeface="Malgun Gothic" pitchFamily="34" charset="-122"/>
-                <a:cs typeface="Malgun Gothic" pitchFamily="34" charset="-120"/>
-              </a:rPr>
-              <a:t>스페셜티 커피</a:t>
-            </a:r>
-            <a:endParaRPr lang="en-US" sz="1500" dirty="0"/>
-          </a:p>
-        </p:txBody>
-      </p:sp>
-      <p:sp>
-        <p:nvSpPr>
-          <p:cNvPr id="21" name="Text 19"/>
-          <p:cNvSpPr txBox="1"/>
-          <p:nvPr/>
-        </p:nvSpPr>
-        <p:spPr>
-          <a:xfrm>
-            <a:off x="566928" y="8616696"/>
-            <a:ext cx="1972056" cy="960120"/>
-          </a:xfrm>
-          <a:prstGeom prst="rect">
-            <a:avLst/>
-          </a:prstGeom>
-          <a:noFill/>
-          <a:ln/>
-        </p:spPr>
-        <p:txBody>
-          <a:bodyPr wrap="square" rtlCol="0" anchor="t"/>
-          <a:lstStyle/>
-          <a:p>
-            <a:pPr algn="l" indent="0" marL="0">
-              <a:lnSpc>
-                <a:spcPct val="124000"/>
-              </a:lnSpc>
-              <a:buNone/>
-            </a:pPr>
-            <a:r>
-              <a:rPr lang="en-US" sz="950" dirty="0">
-                <a:solidFill>
-                  <a:srgbClr val="475569"/>
-                </a:solidFill>
-                <a:latin typeface="Malgun Gothic" pitchFamily="34" charset="0"/>
-                <a:ea typeface="Malgun Gothic" pitchFamily="34" charset="-122"/>
-                <a:cs typeface="Malgun Gothic" pitchFamily="34" charset="-120"/>
-              </a:rPr>
-              <a:t>스페셜티 수준 커피 케이터링. 기업 행사·전시에 적합</a:t>
-            </a:r>
-            <a:endParaRPr lang="en-US" sz="950" dirty="0"/>
-          </a:p>
-        </p:txBody>
-      </p:sp>
-      <p:sp>
-        <p:nvSpPr>
-          <p:cNvPr id="22" name="Shape 20"/>
-          <p:cNvSpPr/>
-          <p:nvPr/>
-        </p:nvSpPr>
-        <p:spPr>
-          <a:xfrm>
-            <a:off x="2795016" y="6150864"/>
-            <a:ext cx="1972056" cy="1972056"/>
-          </a:xfrm>
-          <a:prstGeom prst="rect">
-            <a:avLst/>
-          </a:prstGeom>
-          <a:solidFill>
-            <a:srgbClr val="F4F7FC"/>
-          </a:solidFill>
-          <a:ln w="12700">
-            <a:solidFill>
-              <a:srgbClr val="DBE6F6"/>
-            </a:solidFill>
-            <a:prstDash val="solid"/>
-          </a:ln>
-        </p:spPr>
-      </p:sp>
-      <p:sp>
-        <p:nvSpPr>
-          <p:cNvPr id="23" name="Text 21"/>
-          <p:cNvSpPr txBox="1"/>
-          <p:nvPr/>
-        </p:nvSpPr>
-        <p:spPr>
-          <a:xfrm>
-            <a:off x="2795016" y="6954012"/>
-            <a:ext cx="1972056" cy="365760"/>
-          </a:xfrm>
-          <a:prstGeom prst="rect">
-            <a:avLst/>
-          </a:prstGeom>
-          <a:noFill/>
-          <a:ln/>
-        </p:spPr>
-        <p:txBody>
-          <a:bodyPr wrap="square" rtlCol="0" anchor="ctr"/>
-          <a:lstStyle/>
-          <a:p>
-            <a:pPr algn="ctr" indent="0" marL="0">
-              <a:buNone/>
-            </a:pPr>
-            <a:r>
-              <a:rPr lang="en-US" sz="1100" dirty="0">
-                <a:solidFill>
-                  <a:srgbClr val="94A3B8"/>
-                </a:solidFill>
-                <a:latin typeface="Malgun Gothic" pitchFamily="34" charset="0"/>
-                <a:ea typeface="Malgun Gothic" pitchFamily="34" charset="-122"/>
-                <a:cs typeface="Malgun Gothic" pitchFamily="34" charset="-120"/>
-              </a:rPr>
-              <a:t>사진 준비 중</a:t>
-            </a:r>
-            <a:endParaRPr lang="en-US" sz="1100" dirty="0"/>
-          </a:p>
-        </p:txBody>
-      </p:sp>
-      <p:sp>
-        <p:nvSpPr>
-          <p:cNvPr id="24" name="Text 22"/>
-          <p:cNvSpPr txBox="1"/>
-          <p:nvPr/>
-        </p:nvSpPr>
-        <p:spPr>
-          <a:xfrm>
-            <a:off x="2795016" y="8232648"/>
-            <a:ext cx="1972056" cy="384048"/>
-          </a:xfrm>
-          <a:prstGeom prst="rect">
-            <a:avLst/>
-          </a:prstGeom>
-          <a:noFill/>
-          <a:ln/>
-        </p:spPr>
-        <p:txBody>
-          <a:bodyPr wrap="square" rtlCol="0" anchor="t"/>
-          <a:lstStyle/>
-          <a:p>
-            <a:pPr algn="l" indent="0" marL="0">
-              <a:buNone/>
-            </a:pPr>
-            <a:r>
-              <a:rPr lang="en-US" sz="1500" b="1" dirty="0">
-                <a:solidFill>
-                  <a:srgbClr val="0F172A"/>
-                </a:solidFill>
-                <a:latin typeface="Malgun Gothic" pitchFamily="34" charset="0"/>
-                <a:ea typeface="Malgun Gothic" pitchFamily="34" charset="-122"/>
-                <a:cs typeface="Malgun Gothic" pitchFamily="34" charset="-120"/>
-              </a:rPr>
-              <a:t>커피 · 베이커리</a:t>
-            </a:r>
-            <a:endParaRPr lang="en-US" sz="1500" dirty="0"/>
-          </a:p>
-        </p:txBody>
-      </p:sp>
-      <p:sp>
-        <p:nvSpPr>
-          <p:cNvPr id="25" name="Text 23"/>
-          <p:cNvSpPr txBox="1"/>
-          <p:nvPr/>
-        </p:nvSpPr>
-        <p:spPr>
-          <a:xfrm>
-            <a:off x="2795016" y="8616696"/>
-            <a:ext cx="1972056" cy="960120"/>
-          </a:xfrm>
-          <a:prstGeom prst="rect">
-            <a:avLst/>
-          </a:prstGeom>
-          <a:noFill/>
-          <a:ln/>
-        </p:spPr>
-        <p:txBody>
-          <a:bodyPr wrap="square" rtlCol="0" anchor="t"/>
-          <a:lstStyle/>
-          <a:p>
-            <a:pPr algn="l" indent="0" marL="0">
-              <a:lnSpc>
-                <a:spcPct val="124000"/>
-              </a:lnSpc>
-              <a:buNone/>
-            </a:pPr>
-            <a:r>
-              <a:rPr lang="en-US" sz="950" dirty="0">
-                <a:solidFill>
-                  <a:srgbClr val="475569"/>
-                </a:solidFill>
-                <a:latin typeface="Malgun Gothic" pitchFamily="34" charset="0"/>
-                <a:ea typeface="Malgun Gothic" pitchFamily="34" charset="-122"/>
-                <a:cs typeface="Malgun Gothic" pitchFamily="34" charset="-120"/>
-              </a:rPr>
-              <a:t>프리미엄 커피에 당일 구운 베이커리를 함께 운영</a:t>
-            </a:r>
-            <a:endParaRPr lang="en-US" sz="950" dirty="0"/>
-          </a:p>
-        </p:txBody>
-      </p:sp>
-      <p:sp>
-        <p:nvSpPr>
-          <p:cNvPr id="26" name="Shape 24"/>
-          <p:cNvSpPr/>
-          <p:nvPr/>
-        </p:nvSpPr>
-        <p:spPr>
-          <a:xfrm>
-            <a:off x="5023104" y="6150864"/>
-            <a:ext cx="1972056" cy="1972056"/>
-          </a:xfrm>
-          <a:prstGeom prst="rect">
-            <a:avLst/>
-          </a:prstGeom>
-          <a:solidFill>
-            <a:srgbClr val="F4F7FC"/>
-          </a:solidFill>
-          <a:ln w="12700">
-            <a:solidFill>
-              <a:srgbClr val="DBE6F6"/>
-            </a:solidFill>
-            <a:prstDash val="solid"/>
-          </a:ln>
-        </p:spPr>
-      </p:sp>
-      <p:sp>
-        <p:nvSpPr>
-          <p:cNvPr id="27" name="Text 25"/>
-          <p:cNvSpPr txBox="1"/>
-          <p:nvPr/>
-        </p:nvSpPr>
-        <p:spPr>
-          <a:xfrm>
-            <a:off x="5023104" y="6954012"/>
-            <a:ext cx="1972056" cy="365760"/>
-          </a:xfrm>
-          <a:prstGeom prst="rect">
-            <a:avLst/>
-          </a:prstGeom>
-          <a:noFill/>
-          <a:ln/>
-        </p:spPr>
-        <p:txBody>
-          <a:bodyPr wrap="square" rtlCol="0" anchor="ctr"/>
-          <a:lstStyle/>
-          <a:p>
-            <a:pPr algn="ctr" indent="0" marL="0">
-              <a:buNone/>
-            </a:pPr>
-            <a:r>
-              <a:rPr lang="en-US" sz="1100" dirty="0">
-                <a:solidFill>
-                  <a:srgbClr val="94A3B8"/>
-                </a:solidFill>
-                <a:latin typeface="Malgun Gothic" pitchFamily="34" charset="0"/>
-                <a:ea typeface="Malgun Gothic" pitchFamily="34" charset="-122"/>
-                <a:cs typeface="Malgun Gothic" pitchFamily="34" charset="-120"/>
-              </a:rPr>
-              <a:t>사진 준비 중</a:t>
-            </a:r>
-            <a:endParaRPr lang="en-US" sz="1100" dirty="0"/>
-          </a:p>
-        </p:txBody>
-      </p:sp>
-      <p:sp>
-        <p:nvSpPr>
-          <p:cNvPr id="28" name="Text 26"/>
-          <p:cNvSpPr txBox="1"/>
-          <p:nvPr/>
-        </p:nvSpPr>
-        <p:spPr>
-          <a:xfrm>
-            <a:off x="5023104" y="8232648"/>
-            <a:ext cx="1972056" cy="384048"/>
-          </a:xfrm>
-          <a:prstGeom prst="rect">
-            <a:avLst/>
-          </a:prstGeom>
-          <a:noFill/>
-          <a:ln/>
-        </p:spPr>
-        <p:txBody>
-          <a:bodyPr wrap="square" rtlCol="0" anchor="t"/>
-          <a:lstStyle/>
-          <a:p>
-            <a:pPr algn="l" indent="0" marL="0">
-              <a:buNone/>
-            </a:pPr>
-            <a:r>
-              <a:rPr lang="en-US" sz="1500" b="1" dirty="0">
-                <a:solidFill>
-                  <a:srgbClr val="0F172A"/>
-                </a:solidFill>
-                <a:latin typeface="Malgun Gothic" pitchFamily="34" charset="0"/>
-                <a:ea typeface="Malgun Gothic" pitchFamily="34" charset="-122"/>
-                <a:cs typeface="Malgun Gothic" pitchFamily="34" charset="-120"/>
-              </a:rPr>
-              <a:t>칵테일 · 주류</a:t>
-            </a:r>
-            <a:endParaRPr lang="en-US" sz="1500" dirty="0"/>
-          </a:p>
-        </p:txBody>
-      </p:sp>
-      <p:sp>
-        <p:nvSpPr>
-          <p:cNvPr id="29" name="Text 27"/>
-          <p:cNvSpPr txBox="1"/>
-          <p:nvPr/>
-        </p:nvSpPr>
-        <p:spPr>
-          <a:xfrm>
-            <a:off x="5023104" y="8616696"/>
-            <a:ext cx="1972056" cy="960120"/>
-          </a:xfrm>
-          <a:prstGeom prst="rect">
-            <a:avLst/>
-          </a:prstGeom>
-          <a:noFill/>
-          <a:ln/>
-        </p:spPr>
-        <p:txBody>
-          <a:bodyPr wrap="square" rtlCol="0" anchor="t"/>
-          <a:lstStyle/>
-          <a:p>
-            <a:pPr algn="l" indent="0" marL="0">
-              <a:lnSpc>
-                <a:spcPct val="124000"/>
-              </a:lnSpc>
-              <a:buNone/>
-            </a:pPr>
-            <a:r>
-              <a:rPr lang="en-US" sz="950" dirty="0">
-                <a:solidFill>
-                  <a:srgbClr val="475569"/>
-                </a:solidFill>
-                <a:latin typeface="Malgun Gothic" pitchFamily="34" charset="0"/>
-                <a:ea typeface="Malgun Gothic" pitchFamily="34" charset="-122"/>
-                <a:cs typeface="Malgun Gothic" pitchFamily="34" charset="-120"/>
-              </a:rPr>
-              <a:t>야간 행사 전용. 주류 판매 가능 여부는 장소별 확인 필요</a:t>
-            </a:r>
-            <a:endParaRPr lang="en-US" sz="950" dirty="0"/>
-          </a:p>
-        </p:txBody>
-      </p:sp>
-      <p:sp>
-        <p:nvSpPr>
-          <p:cNvPr id="30" name="Text 28"/>
-          <p:cNvSpPr txBox="1"/>
-          <p:nvPr/>
-        </p:nvSpPr>
-        <p:spPr>
-          <a:xfrm>
-            <a:off x="566928" y="10122408"/>
-            <a:ext cx="6428232" cy="274320"/>
-          </a:xfrm>
-          <a:prstGeom prst="rect">
-            <a:avLst/>
-          </a:prstGeom>
-          <a:noFill/>
-          <a:ln/>
-        </p:spPr>
-        <p:txBody>
-          <a:bodyPr wrap="square" rtlCol="0" anchor="ctr"/>
-          <a:lstStyle/>
-          <a:p>
-            <a:pPr algn="l" indent="0" marL="0">
-              <a:buNone/>
-            </a:pPr>
-            <a:r>
-              <a:rPr lang="en-US" sz="800" dirty="0">
-                <a:solidFill>
-                  <a:srgbClr val="94A3B8"/>
-                </a:solidFill>
-                <a:latin typeface="Malgun Gothic" pitchFamily="34" charset="0"/>
-                <a:ea typeface="Malgun Gothic" pitchFamily="34" charset="-122"/>
-                <a:cs typeface="Malgun Gothic" pitchFamily="34" charset="-120"/>
-              </a:rPr>
-              <a:t>플릿 유니온 · www.flitunion.com</a:t>
-            </a:r>
-            <a:endParaRPr lang="en-US" sz="800" dirty="0"/>
-          </a:p>
-        </p:txBody>
-      </p:sp>
-      <p:sp>
-        <p:nvSpPr>
-          <p:cNvPr id="31" name="Text 29"/>
-          <p:cNvSpPr txBox="1"/>
-          <p:nvPr/>
-        </p:nvSpPr>
-        <p:spPr>
-          <a:xfrm>
-            <a:off x="566928" y="10122408"/>
-            <a:ext cx="6428232" cy="274320"/>
-          </a:xfrm>
-          <a:prstGeom prst="rect">
-            <a:avLst/>
-          </a:prstGeom>
-          <a:noFill/>
-          <a:ln/>
-        </p:spPr>
-        <p:txBody>
-          <a:bodyPr wrap="square" rtlCol="0" anchor="ctr"/>
-          <a:lstStyle/>
-          <a:p>
-            <a:pPr algn="r" indent="0" marL="0">
-              <a:buNone/>
-            </a:pPr>
-            <a:r>
-              <a:rPr lang="en-US" sz="800" dirty="0">
-                <a:solidFill>
-                  <a:srgbClr val="94A3B8"/>
-                </a:solidFill>
-                <a:latin typeface="Malgun Gothic" pitchFamily="34" charset="0"/>
-                <a:ea typeface="Malgun Gothic" pitchFamily="34" charset="-122"/>
-                <a:cs typeface="Malgun Gothic" pitchFamily="34" charset="-120"/>
-              </a:rPr>
-              <a:t>4 / 4</a:t>
-            </a:r>
-            <a:endParaRPr lang="en-US" sz="800" dirty="0"/>
+              <a:t>3 / 3</a:t>
+            </a:r>
+            <a:endParaRPr lang="en-US" sz="750" dirty="0"/>
           </a:p>
         </p:txBody>
       </p:sp>
